--- a/doc/pipecat-voicebot-voiceapi-architecture-JP.pptx
+++ b/doc/pipecat-voicebot-voiceapi-architecture-JP.pptx
@@ -8,13 +8,16 @@
     <p:sldId id="256" r:id="rId7"/>
     <p:sldId id="257" r:id="rId8"/>
     <p:sldId id="258" r:id="rId9"/>
+    <p:sldId id="276" r:id="rId27"/>
     <p:sldId id="259" r:id="rId10"/>
     <p:sldId id="260" r:id="rId11"/>
     <p:sldId id="261" r:id="rId12"/>
+    <p:sldId id="277" r:id="rId28"/>
     <p:sldId id="262" r:id="rId13"/>
     <p:sldId id="263" r:id="rId14"/>
     <p:sldId id="264" r:id="rId15"/>
     <p:sldId id="265" r:id="rId16"/>
+    <p:sldId id="278" r:id="rId29"/>
     <p:sldId id="266" r:id="rId17"/>
     <p:sldId id="267" r:id="rId18"/>
     <p:sldId id="268" r:id="rId19"/>
@@ -3241,7 +3244,7 @@
               </a:defRPr>
             </a:pPr>
             <a:r>
-              <a:t>データフロー: 電話 (PSTN)</a:t>
+              <a:t>static/index.html: ブラウザ UI</a:t>
             </a:r>
           </a:p>
         </p:txBody>
@@ -3282,130 +3285,145 @@
               </a:defRPr>
             </a:pPr>
             <a:r>
-              <a:t>1. ユーザー: Vonage 電話番号にコール</a:t>
-            </a:r>
-          </a:p>
-          <a:p>
-            <a:pPr>
-              <a:spcBef>
-                <a:spcPts val="600"/>
-              </a:spcBef>
-              <a:spcAft>
-                <a:spcPts val="600"/>
-              </a:spcAft>
-              <a:defRPr sz="1800">
-                <a:solidFill>
-                  <a:srgbClr val="323232"/>
-                </a:solidFill>
-              </a:defRPr>
-            </a:pPr>
-            <a:r>
-              <a:t>2. Vonage: GET /voice/webhook に request 送信</a:t>
-            </a:r>
-          </a:p>
-          <a:p>
-            <a:pPr>
-              <a:spcBef>
-                <a:spcPts val="600"/>
-              </a:spcBef>
-              <a:spcAft>
-                <a:spcPts val="600"/>
-              </a:spcAft>
-              <a:defRPr sz="1800">
-                <a:solidFill>
-                  <a:srgbClr val="323232"/>
-                </a:solidFill>
-              </a:defRPr>
-            </a:pPr>
-            <a:r>
-              <a:t>3. サーバー: NCCO を返却 (WebSocket endpoint を指定)</a:t>
-            </a:r>
-          </a:p>
-          <a:p>
-            <a:pPr>
-              <a:spcBef>
-                <a:spcPts val="600"/>
-              </a:spcBef>
-              <a:spcAft>
-                <a:spcPts val="600"/>
-              </a:spcAft>
-              <a:defRPr sz="1800">
-                <a:solidFill>
-                  <a:srgbClr val="323232"/>
-                </a:solidFill>
-              </a:defRPr>
-            </a:pPr>
-            <a:r>
-              <a:t>4. Vonage: 通話を自動的に WebSocket /ws に接続</a:t>
-            </a:r>
-          </a:p>
-          <a:p>
-            <a:pPr>
-              <a:spcBef>
-                <a:spcPts val="600"/>
-              </a:spcBef>
-              <a:spcAft>
-                <a:spcPts val="600"/>
-              </a:spcAft>
-              <a:defRPr sz="1800">
-                <a:solidFill>
-                  <a:srgbClr val="323232"/>
-                </a:solidFill>
-              </a:defRPr>
-            </a:pPr>
-            <a:r>
-              <a:t>5. ボット: Pipecat Pipeline 開始</a:t>
-            </a:r>
-          </a:p>
-          <a:p>
-            <a:pPr>
-              <a:spcBef>
-                <a:spcPts val="600"/>
-              </a:spcBef>
-              <a:spcAft>
-                <a:spcPts val="600"/>
-              </a:spcAft>
-              <a:defRPr sz="1800">
-                <a:solidFill>
-                  <a:srgbClr val="323232"/>
-                </a:solidFill>
-              </a:defRPr>
-            </a:pPr>
-            <a:r>
-              <a:t>6. 双方向: 電話音声 ↔ Vonage ↔ Pipecat ↔ 応答音声</a:t>
-            </a:r>
-          </a:p>
-          <a:p>
-            <a:pPr>
-              <a:spcBef>
-                <a:spcPts val="600"/>
-              </a:spcBef>
-              <a:spcAft>
-                <a:spcPts val="600"/>
-              </a:spcAft>
-              <a:defRPr sz="1800">
-                <a:solidFill>
-                  <a:srgbClr val="323232"/>
-                </a:solidFill>
-              </a:defRPr>
-            </a:pPr>
-          </a:p>
-          <a:p>
-            <a:pPr>
-              <a:spcBef>
-                <a:spcPts val="600"/>
-              </a:spcBef>
-              <a:spcAft>
-                <a:spcPts val="600"/>
-              </a:spcAft>
-              <a:defRPr sz="1800">
-                <a:solidFill>
-                  <a:srgbClr val="323232"/>
-                </a:solidFill>
-              </a:defRPr>
-            </a:pPr>
-            <a:r>
-              <a:t>利点: ブラウザ不要、従来の電話で利用可能</a:t>
+              <a:t>技術: Vonage OpenTok SDK (バニラ JavaScript)</a:t>
+            </a:r>
+          </a:p>
+          <a:p>
+            <a:pPr>
+              <a:spcBef>
+                <a:spcPts val="600"/>
+              </a:spcBef>
+              <a:spcAft>
+                <a:spcPts val="600"/>
+              </a:spcAft>
+              <a:defRPr sz="1800">
+                <a:solidFill>
+                  <a:srgbClr val="323232"/>
+                </a:solidFill>
+              </a:defRPr>
+            </a:pPr>
+          </a:p>
+          <a:p>
+            <a:pPr>
+              <a:spcBef>
+                <a:spcPts val="600"/>
+              </a:spcBef>
+              <a:spcAft>
+                <a:spcPts val="600"/>
+              </a:spcAft>
+              <a:defRPr sz="1800">
+                <a:solidFill>
+                  <a:srgbClr val="323232"/>
+                </a:solidFill>
+              </a:defRPr>
+            </a:pPr>
+            <a:r>
+              <a:t>機能:</a:t>
+            </a:r>
+          </a:p>
+          <a:p>
+            <a:pPr lvl="1">
+              <a:spcBef>
+                <a:spcPts val="600"/>
+              </a:spcBef>
+              <a:spcAft>
+                <a:spcPts val="600"/>
+              </a:spcAft>
+              <a:defRPr sz="1600">
+                <a:solidFill>
+                  <a:srgbClr val="323232"/>
+                </a:solidFill>
+              </a:defRPr>
+            </a:pPr>
+            <a:r>
+              <a:t>接続ボタン: POST /demo/connect → Vonage セッション作成</a:t>
+            </a:r>
+          </a:p>
+          <a:p>
+            <a:pPr lvl="1">
+              <a:spcBef>
+                <a:spcPts val="600"/>
+              </a:spcBef>
+              <a:spcAft>
+                <a:spcPts val="600"/>
+              </a:spcAft>
+              <a:defRPr sz="1600">
+                <a:solidFill>
+                  <a:srgbClr val="323232"/>
+                </a:solidFill>
+              </a:defRPr>
+            </a:pPr>
+            <a:r>
+              <a:t>ステータス表示: 接続状態をリアルタイム更新</a:t>
+            </a:r>
+          </a:p>
+          <a:p>
+            <a:pPr lvl="1">
+              <a:spcBef>
+                <a:spcPts val="600"/>
+              </a:spcBef>
+              <a:spcAft>
+                <a:spcPts val="600"/>
+              </a:spcAft>
+              <a:defRPr sz="1600">
+                <a:solidFill>
+                  <a:srgbClr val="323232"/>
+                </a:solidFill>
+              </a:defRPr>
+            </a:pPr>
+            <a:r>
+              <a:t>ログパネル: イベント・エラーをタイムスタンプ付きで記録</a:t>
+            </a:r>
+          </a:p>
+          <a:p>
+            <a:pPr lvl="1">
+              <a:spcBef>
+                <a:spcPts val="600"/>
+              </a:spcBef>
+              <a:spcAft>
+                <a:spcPts val="600"/>
+              </a:spcAft>
+              <a:defRPr sz="1600">
+                <a:solidFill>
+                  <a:srgbClr val="323232"/>
+                </a:solidFill>
+              </a:defRPr>
+            </a:pPr>
+            <a:r>
+              <a:t>音声ストリーム: ボットのマイク音声を購読 (audioOnly=true)</a:t>
+            </a:r>
+          </a:p>
+          <a:p>
+            <a:pPr>
+              <a:spcBef>
+                <a:spcPts val="600"/>
+              </a:spcBef>
+              <a:spcAft>
+                <a:spcPts val="600"/>
+              </a:spcAft>
+              <a:defRPr sz="1800">
+                <a:solidFill>
+                  <a:srgbClr val="323232"/>
+                </a:solidFill>
+              </a:defRPr>
+            </a:pPr>
+          </a:p>
+          <a:p>
+            <a:pPr>
+              <a:spcBef>
+                <a:spcPts val="600"/>
+              </a:spcBef>
+              <a:spcAft>
+                <a:spcPts val="600"/>
+              </a:spcAft>
+              <a:defRPr sz="1800">
+                <a:solidFill>
+                  <a:srgbClr val="323232"/>
+                </a:solidFill>
+              </a:defRPr>
+            </a:pPr>
+            <a:r>
+              <a:t>セッション流: OT.initSession() → token で接続 → subscribe()</a:t>
             </a:r>
           </a:p>
         </p:txBody>
@@ -3466,7 +3484,7 @@
               </a:defRPr>
             </a:pPr>
             <a:r>
-              <a:t>依存関係とローカルモデル</a:t>
+              <a:t>データフロー: ビデオセッション</a:t>
             </a:r>
           </a:p>
         </p:txBody>
@@ -3507,166 +3525,115 @@
               </a:defRPr>
             </a:pPr>
             <a:r>
-              <a:t>Python パッケージ:</a:t>
-            </a:r>
-          </a:p>
-          <a:p>
-            <a:pPr lvl="1">
-              <a:spcBef>
-                <a:spcPts val="600"/>
-              </a:spcBef>
-              <a:spcAft>
-                <a:spcPts val="600"/>
-              </a:spcAft>
-              <a:defRPr sz="1600">
-                <a:solidFill>
-                  <a:srgbClr val="323232"/>
-                </a:solidFill>
-              </a:defRPr>
-            </a:pPr>
-            <a:r>
-              <a:t>pipecat-ai: パイプライン・STT/TTS/LLM 統合</a:t>
-            </a:r>
-          </a:p>
-          <a:p>
-            <a:pPr lvl="1">
-              <a:spcBef>
-                <a:spcPts val="600"/>
-              </a:spcBef>
-              <a:spcAft>
-                <a:spcPts val="600"/>
-              </a:spcAft>
-              <a:defRPr sz="1600">
-                <a:solidFill>
-                  <a:srgbClr val="323232"/>
-                </a:solidFill>
-              </a:defRPr>
-            </a:pPr>
-            <a:r>
-              <a:t>vonage: Vonage Video/Voice API</a:t>
-            </a:r>
-          </a:p>
-          <a:p>
-            <a:pPr lvl="1">
-              <a:spcBef>
-                <a:spcPts val="600"/>
-              </a:spcBef>
-              <a:spcAft>
-                <a:spcPts val="600"/>
-              </a:spcAft>
-              <a:defRPr sz="1600">
-                <a:solidFill>
-                  <a:srgbClr val="323232"/>
-                </a:solidFill>
-              </a:defRPr>
-            </a:pPr>
-            <a:r>
-              <a:t>uvicorn: ASGI サーバー</a:t>
-            </a:r>
-          </a:p>
-          <a:p>
-            <a:pPr lvl="1">
-              <a:spcBef>
-                <a:spcPts val="600"/>
-              </a:spcBef>
-              <a:spcAft>
-                <a:spcPts val="600"/>
-              </a:spcAft>
-              <a:defRPr sz="1600">
-                <a:solidFill>
-                  <a:srgbClr val="323232"/>
-                </a:solidFill>
-              </a:defRPr>
-            </a:pPr>
-            <a:r>
-              <a:t>fastapi: Web フレームワーク</a:t>
-            </a:r>
-          </a:p>
-          <a:p>
-            <a:pPr>
-              <a:spcBef>
-                <a:spcPts val="600"/>
-              </a:spcBef>
-              <a:spcAft>
-                <a:spcPts val="600"/>
-              </a:spcAft>
-              <a:defRPr sz="1800">
-                <a:solidFill>
-                  <a:srgbClr val="323232"/>
-                </a:solidFill>
-              </a:defRPr>
-            </a:pPr>
-          </a:p>
-          <a:p>
-            <a:pPr>
-              <a:spcBef>
-                <a:spcPts val="600"/>
-              </a:spcBef>
-              <a:spcAft>
-                <a:spcPts val="600"/>
-              </a:spcAft>
-              <a:defRPr sz="1800">
-                <a:solidFill>
-                  <a:srgbClr val="323232"/>
-                </a:solidFill>
-              </a:defRPr>
-            </a:pPr>
-            <a:r>
-              <a:t>ローカルモデル (LM Studio 必須):</a:t>
-            </a:r>
-          </a:p>
-          <a:p>
-            <a:pPr lvl="1">
-              <a:spcBef>
-                <a:spcPts val="600"/>
-              </a:spcBef>
-              <a:spcAft>
-                <a:spcPts val="600"/>
-              </a:spcAft>
-              <a:defRPr sz="1600">
-                <a:solidFill>
-                  <a:srgbClr val="323232"/>
-                </a:solidFill>
-              </a:defRPr>
-            </a:pPr>
-            <a:r>
-              <a:t>LLM: Gemma/Llama 等 (ユーザー選択可能)</a:t>
-            </a:r>
-          </a:p>
-          <a:p>
-            <a:pPr lvl="1">
-              <a:spcBef>
-                <a:spcPts val="600"/>
-              </a:spcBef>
-              <a:spcAft>
-                <a:spcPts val="600"/>
-              </a:spcAft>
-              <a:defRPr sz="1600">
-                <a:solidFill>
-                  <a:srgbClr val="323232"/>
-                </a:solidFill>
-              </a:defRPr>
-            </a:pPr>
-            <a:r>
-              <a:t>STT: Whisper (LARGE_V3_TURBO_Q4 推奨)</a:t>
-            </a:r>
-          </a:p>
-          <a:p>
-            <a:pPr lvl="1">
-              <a:spcBef>
-                <a:spcPts val="600"/>
-              </a:spcBef>
-              <a:spcAft>
-                <a:spcPts val="600"/>
-              </a:spcAft>
-              <a:defRPr sz="1600">
-                <a:solidFill>
-                  <a:srgbClr val="323232"/>
-                </a:solidFill>
-              </a:defRPr>
-            </a:pPr>
-            <a:r>
-              <a:t>TTS: pyopenjtalk (HTS ベース)</a:t>
+              <a:t>1. ユーザー: 「接続」ボタンをクリック</a:t>
+            </a:r>
+          </a:p>
+          <a:p>
+            <a:pPr>
+              <a:spcBef>
+                <a:spcPts val="600"/>
+              </a:spcBef>
+              <a:spcAft>
+                <a:spcPts val="600"/>
+              </a:spcAft>
+              <a:defRPr sz="1800">
+                <a:solidFill>
+                  <a:srgbClr val="323232"/>
+                </a:solidFill>
+              </a:defRPr>
+            </a:pPr>
+            <a:r>
+              <a:t>2. ブラウザ: POST /demo/connect を呼び出し</a:t>
+            </a:r>
+          </a:p>
+          <a:p>
+            <a:pPr>
+              <a:spcBef>
+                <a:spcPts val="600"/>
+              </a:spcBef>
+              <a:spcAft>
+                <a:spcPts val="600"/>
+              </a:spcAft>
+              <a:defRPr sz="1800">
+                <a:solidFill>
+                  <a:srgbClr val="323232"/>
+                </a:solidFill>
+              </a:defRPr>
+            </a:pPr>
+            <a:r>
+              <a:t>3. サーバー: Vonage Session 作成 → Audio Connector 起動</a:t>
+            </a:r>
+          </a:p>
+          <a:p>
+            <a:pPr>
+              <a:spcBef>
+                <a:spcPts val="600"/>
+              </a:spcBef>
+              <a:spcAft>
+                <a:spcPts val="600"/>
+              </a:spcAft>
+              <a:defRPr sz="1800">
+                <a:solidFill>
+                  <a:srgbClr val="323232"/>
+                </a:solidFill>
+              </a:defRPr>
+            </a:pPr>
+            <a:r>
+              <a:t>4. ブラウザ: OT.initSession() でセッションに参加</a:t>
+            </a:r>
+          </a:p>
+          <a:p>
+            <a:pPr>
+              <a:spcBef>
+                <a:spcPts val="600"/>
+              </a:spcBef>
+              <a:spcAft>
+                <a:spcPts val="600"/>
+              </a:spcAft>
+              <a:defRPr sz="1800">
+                <a:solidFill>
+                  <a:srgbClr val="323232"/>
+                </a:solidFill>
+              </a:defRPr>
+            </a:pPr>
+            <a:r>
+              <a:t>5. Vonage: Audio Connector が WebSocket に接続</a:t>
+            </a:r>
+          </a:p>
+          <a:p>
+            <a:pPr>
+              <a:spcBef>
+                <a:spcPts val="600"/>
+              </a:spcBef>
+              <a:spcAft>
+                <a:spcPts val="600"/>
+              </a:spcAft>
+              <a:defRPr sz="1800">
+                <a:solidFill>
+                  <a:srgbClr val="323232"/>
+                </a:solidFill>
+              </a:defRPr>
+            </a:pPr>
+            <a:r>
+              <a:t>6. ボット: 初期挨拶を送信 (テキスト → TTS → 音声)</a:t>
+            </a:r>
+          </a:p>
+          <a:p>
+            <a:pPr>
+              <a:spcBef>
+                <a:spcPts val="600"/>
+              </a:spcBef>
+              <a:spcAft>
+                <a:spcPts val="600"/>
+              </a:spcAft>
+              <a:defRPr sz="1800">
+                <a:solidFill>
+                  <a:srgbClr val="323232"/>
+                </a:solidFill>
+              </a:defRPr>
+            </a:pPr>
+            <a:r>
+              <a:t>7. 双方向: ユーザー音声 ↔ Vonage ↔ Pipecat Pipeline ↔ 応答音声</a:t>
             </a:r>
           </a:p>
         </p:txBody>
@@ -3727,7 +3694,7 @@
               </a:defRPr>
             </a:pPr>
             <a:r>
-              <a:t>環境変数設定 (.env)</a:t>
+              <a:t>データフロー: 電話 (PSTN)</a:t>
             </a:r>
           </a:p>
         </p:txBody>
@@ -3768,166 +3735,130 @@
               </a:defRPr>
             </a:pPr>
             <a:r>
-              <a:t>LM Studio:</a:t>
-            </a:r>
-          </a:p>
-          <a:p>
-            <a:pPr lvl="1">
-              <a:spcBef>
-                <a:spcPts val="600"/>
-              </a:spcBef>
-              <a:spcAft>
-                <a:spcPts val="600"/>
-              </a:spcAft>
-              <a:defRPr sz="1600">
-                <a:solidFill>
-                  <a:srgbClr val="323232"/>
-                </a:solidFill>
-              </a:defRPr>
-            </a:pPr>
-            <a:r>
-              <a:t>LM_STUDIO_BASE_URL=http://localhost:1234/v1</a:t>
-            </a:r>
-          </a:p>
-          <a:p>
-            <a:pPr lvl="1">
-              <a:spcBef>
-                <a:spcPts val="600"/>
-              </a:spcBef>
-              <a:spcAft>
-                <a:spcPts val="600"/>
-              </a:spcAft>
-              <a:defRPr sz="1600">
-                <a:solidFill>
-                  <a:srgbClr val="323232"/>
-                </a:solidFill>
-              </a:defRPr>
-            </a:pPr>
-            <a:r>
-              <a:t>LM_MODEL=gemma-4-26B-A4B-it-MLX-8bit</a:t>
-            </a:r>
-          </a:p>
-          <a:p>
-            <a:pPr lvl="1">
-              <a:spcBef>
-                <a:spcPts val="600"/>
-              </a:spcBef>
-              <a:spcAft>
-                <a:spcPts val="600"/>
-              </a:spcAft>
-              <a:defRPr sz="1600">
-                <a:solidFill>
-                  <a:srgbClr val="323232"/>
-                </a:solidFill>
-              </a:defRPr>
-            </a:pPr>
-            <a:r>
-              <a:t>STT_LANGUAGE=ja</a:t>
-            </a:r>
-          </a:p>
-          <a:p>
-            <a:pPr>
-              <a:spcBef>
-                <a:spcPts val="600"/>
-              </a:spcBef>
-              <a:spcAft>
-                <a:spcPts val="600"/>
-              </a:spcAft>
-              <a:defRPr sz="1800">
-                <a:solidFill>
-                  <a:srgbClr val="323232"/>
-                </a:solidFill>
-              </a:defRPr>
-            </a:pPr>
-          </a:p>
-          <a:p>
-            <a:pPr>
-              <a:spcBef>
-                <a:spcPts val="600"/>
-              </a:spcBef>
-              <a:spcAft>
-                <a:spcPts val="600"/>
-              </a:spcAft>
-              <a:defRPr sz="1800">
-                <a:solidFill>
-                  <a:srgbClr val="323232"/>
-                </a:solidFill>
-              </a:defRPr>
-            </a:pPr>
-            <a:r>
-              <a:t>Vonage:</a:t>
-            </a:r>
-          </a:p>
-          <a:p>
-            <a:pPr lvl="1">
-              <a:spcBef>
-                <a:spcPts val="600"/>
-              </a:spcBef>
-              <a:spcAft>
-                <a:spcPts val="600"/>
-              </a:spcAft>
-              <a:defRPr sz="1600">
-                <a:solidFill>
-                  <a:srgbClr val="323232"/>
-                </a:solidFill>
-              </a:defRPr>
-            </a:pPr>
-            <a:r>
-              <a:t>VONAGE_APPLICATION_ID=&lt;your-app-id&gt;</a:t>
-            </a:r>
-          </a:p>
-          <a:p>
-            <a:pPr lvl="1">
-              <a:spcBef>
-                <a:spcPts val="600"/>
-              </a:spcBef>
-              <a:spcAft>
-                <a:spcPts val="600"/>
-              </a:spcAft>
-              <a:defRPr sz="1600">
-                <a:solidFill>
-                  <a:srgbClr val="323232"/>
-                </a:solidFill>
-              </a:defRPr>
-            </a:pPr>
-            <a:r>
-              <a:t>VONAGE_PRIVATE_KEY=&lt;path-or-raw-key&gt;</a:t>
-            </a:r>
-          </a:p>
-          <a:p>
-            <a:pPr lvl="1">
-              <a:spcBef>
-                <a:spcPts val="600"/>
-              </a:spcBef>
-              <a:spcAft>
-                <a:spcPts val="600"/>
-              </a:spcAft>
-              <a:defRPr sz="1600">
-                <a:solidFill>
-                  <a:srgbClr val="323232"/>
-                </a:solidFill>
-              </a:defRPr>
-            </a:pPr>
-            <a:r>
-              <a:t>VONAGE_AUDIO_RATE=16000</a:t>
-            </a:r>
-          </a:p>
-          <a:p>
-            <a:pPr lvl="1">
-              <a:spcBef>
-                <a:spcPts val="600"/>
-              </a:spcBef>
-              <a:spcAft>
-                <a:spcPts val="600"/>
-              </a:spcAft>
-              <a:defRPr sz="1600">
-                <a:solidFill>
-                  <a:srgbClr val="323232"/>
-                </a:solidFill>
-              </a:defRPr>
-            </a:pPr>
-            <a:r>
-              <a:t>WS_URI=wss://&lt;tunnel-url&gt;/ws (オプション)</a:t>
+              <a:t>1. ユーザー: Vonage 電話番号にコール</a:t>
+            </a:r>
+          </a:p>
+          <a:p>
+            <a:pPr>
+              <a:spcBef>
+                <a:spcPts val="600"/>
+              </a:spcBef>
+              <a:spcAft>
+                <a:spcPts val="600"/>
+              </a:spcAft>
+              <a:defRPr sz="1800">
+                <a:solidFill>
+                  <a:srgbClr val="323232"/>
+                </a:solidFill>
+              </a:defRPr>
+            </a:pPr>
+            <a:r>
+              <a:t>2. Vonage: GET /voice/webhook に request 送信</a:t>
+            </a:r>
+          </a:p>
+          <a:p>
+            <a:pPr>
+              <a:spcBef>
+                <a:spcPts val="600"/>
+              </a:spcBef>
+              <a:spcAft>
+                <a:spcPts val="600"/>
+              </a:spcAft>
+              <a:defRPr sz="1800">
+                <a:solidFill>
+                  <a:srgbClr val="323232"/>
+                </a:solidFill>
+              </a:defRPr>
+            </a:pPr>
+            <a:r>
+              <a:t>3. サーバー: NCCO を返却 (WebSocket endpoint を指定)</a:t>
+            </a:r>
+          </a:p>
+          <a:p>
+            <a:pPr>
+              <a:spcBef>
+                <a:spcPts val="600"/>
+              </a:spcBef>
+              <a:spcAft>
+                <a:spcPts val="600"/>
+              </a:spcAft>
+              <a:defRPr sz="1800">
+                <a:solidFill>
+                  <a:srgbClr val="323232"/>
+                </a:solidFill>
+              </a:defRPr>
+            </a:pPr>
+            <a:r>
+              <a:t>4. Vonage: 通話を自動的に WebSocket /ws に接続</a:t>
+            </a:r>
+          </a:p>
+          <a:p>
+            <a:pPr>
+              <a:spcBef>
+                <a:spcPts val="600"/>
+              </a:spcBef>
+              <a:spcAft>
+                <a:spcPts val="600"/>
+              </a:spcAft>
+              <a:defRPr sz="1800">
+                <a:solidFill>
+                  <a:srgbClr val="323232"/>
+                </a:solidFill>
+              </a:defRPr>
+            </a:pPr>
+            <a:r>
+              <a:t>5. ボット: Pipecat Pipeline 開始</a:t>
+            </a:r>
+          </a:p>
+          <a:p>
+            <a:pPr>
+              <a:spcBef>
+                <a:spcPts val="600"/>
+              </a:spcBef>
+              <a:spcAft>
+                <a:spcPts val="600"/>
+              </a:spcAft>
+              <a:defRPr sz="1800">
+                <a:solidFill>
+                  <a:srgbClr val="323232"/>
+                </a:solidFill>
+              </a:defRPr>
+            </a:pPr>
+            <a:r>
+              <a:t>6. 双方向: 電話音声 ↔ Vonage ↔ Pipecat ↔ 応答音声</a:t>
+            </a:r>
+          </a:p>
+          <a:p>
+            <a:pPr>
+              <a:spcBef>
+                <a:spcPts val="600"/>
+              </a:spcBef>
+              <a:spcAft>
+                <a:spcPts val="600"/>
+              </a:spcAft>
+              <a:defRPr sz="1800">
+                <a:solidFill>
+                  <a:srgbClr val="323232"/>
+                </a:solidFill>
+              </a:defRPr>
+            </a:pPr>
+          </a:p>
+          <a:p>
+            <a:pPr>
+              <a:spcBef>
+                <a:spcPts val="600"/>
+              </a:spcBef>
+              <a:spcAft>
+                <a:spcPts val="600"/>
+              </a:spcAft>
+              <a:defRPr sz="1800">
+                <a:solidFill>
+                  <a:srgbClr val="323232"/>
+                </a:solidFill>
+              </a:defRPr>
+            </a:pPr>
+            <a:r>
+              <a:t>利点: ブラウザ不要、従来の電話で利用可能</a:t>
             </a:r>
           </a:p>
         </p:txBody>
@@ -3946,7 +3877,7 @@
     <p:bg>
       <p:bgPr>
         <a:solidFill>
-          <a:srgbClr val="F5F5F5"/>
+          <a:srgbClr val="FFFFFF"/>
         </a:solidFill>
         <a:effectLst/>
       </p:bgPr>
@@ -3966,8 +3897,8 @@
         </p:nvSpPr>
         <p:spPr>
           <a:xfrm>
-            <a:off x="457200" y="365760"/>
-            <a:ext cx="8229600" cy="731520"/>
+            <a:off x="365760" y="228600"/>
+            <a:ext cx="8412480" cy="640080"/>
           </a:xfrm>
           <a:prstGeom prst="rect">
             <a:avLst/>
@@ -3975,269 +3906,48 @@
           <a:noFill/>
         </p:spPr>
         <p:txBody>
-          <a:bodyPr wrap="none">
+          <a:bodyPr wrap="square">
             <a:spAutoFit/>
           </a:bodyPr>
           <a:lstStyle/>
           <a:p>
-            <a:pPr>
-              <a:defRPr sz="4000" b="1">
+            <a:pPr algn="ctr">
+              <a:defRPr sz="2800" b="1">
                 <a:solidFill>
                   <a:srgbClr val="1976D2"/>
                 </a:solidFill>
               </a:defRPr>
             </a:pPr>
             <a:r>
-              <a:t>起動手順</a:t>
-            </a:r>
-          </a:p>
-        </p:txBody>
-      </p:sp>
-      <p:sp>
-        <p:nvSpPr>
-          <p:cNvPr id="3" name="TextBox 2"/>
-          <p:cNvSpPr txBox="1"/>
+              <a:t>図解: データフロー</a:t>
+            </a:r>
+          </a:p>
+        </p:txBody>
+      </p:sp>
+      <p:pic>
+        <p:nvPicPr>
+          <p:cNvPr id="3" name="Picture 2" descr="data_flow_jp.png"/>
+          <p:cNvPicPr>
+            <a:picLocks noChangeAspect="1"/>
+          </p:cNvPicPr>
           <p:nvPr/>
-        </p:nvSpPr>
+        </p:nvPicPr>
+        <p:blipFill>
+          <a:blip r:embed="rId3"/>
+          <a:stretch>
+            <a:fillRect/>
+          </a:stretch>
+        </p:blipFill>
         <p:spPr>
           <a:xfrm>
-            <a:off x="640080" y="1280160"/>
-            <a:ext cx="7863840" cy="5029200"/>
+            <a:off x="3779134" y="1051560"/>
+            <a:ext cx="1585731" cy="5486400"/>
           </a:xfrm>
           <a:prstGeom prst="rect">
             <a:avLst/>
           </a:prstGeom>
-          <a:noFill/>
         </p:spPr>
-        <p:txBody>
-          <a:bodyPr wrap="square">
-            <a:spAutoFit/>
-          </a:bodyPr>
-          <a:lstStyle/>
-          <a:p>
-            <a:pPr>
-              <a:spcBef>
-                <a:spcPts val="600"/>
-              </a:spcBef>
-              <a:spcAft>
-                <a:spcPts val="600"/>
-              </a:spcAft>
-              <a:defRPr sz="1800">
-                <a:solidFill>
-                  <a:srgbClr val="323232"/>
-                </a:solidFill>
-              </a:defRPr>
-            </a:pPr>
-            <a:r>
-              <a:t>1. LM Studio を localhost:1234 で起動</a:t>
-            </a:r>
-          </a:p>
-          <a:p>
-            <a:pPr lvl="1">
-              <a:spcBef>
-                <a:spcPts val="600"/>
-              </a:spcBef>
-              <a:spcAft>
-                <a:spcPts val="600"/>
-              </a:spcAft>
-              <a:defRPr sz="1600">
-                <a:solidFill>
-                  <a:srgbClr val="323232"/>
-                </a:solidFill>
-              </a:defRPr>
-            </a:pPr>
-            <a:r>
-              <a:t>モデルをロード (Gemma/Llama など)</a:t>
-            </a:r>
-          </a:p>
-          <a:p>
-            <a:pPr>
-              <a:spcBef>
-                <a:spcPts val="600"/>
-              </a:spcBef>
-              <a:spcAft>
-                <a:spcPts val="600"/>
-              </a:spcAft>
-              <a:defRPr sz="1800">
-                <a:solidFill>
-                  <a:srgbClr val="323232"/>
-                </a:solidFill>
-              </a:defRPr>
-            </a:pPr>
-          </a:p>
-          <a:p>
-            <a:pPr>
-              <a:spcBef>
-                <a:spcPts val="600"/>
-              </a:spcBef>
-              <a:spcAft>
-                <a:spcPts val="600"/>
-              </a:spcAft>
-              <a:defRPr sz="1800">
-                <a:solidFill>
-                  <a:srgbClr val="323232"/>
-                </a:solidFill>
-              </a:defRPr>
-            </a:pPr>
-            <a:r>
-              <a:t>2. リポジトリを .env ファイルで設定</a:t>
-            </a:r>
-          </a:p>
-          <a:p>
-            <a:pPr>
-              <a:spcBef>
-                <a:spcPts val="600"/>
-              </a:spcBef>
-              <a:spcAft>
-                <a:spcPts val="600"/>
-              </a:spcAft>
-              <a:defRPr sz="1800">
-                <a:solidFill>
-                  <a:srgbClr val="323232"/>
-                </a:solidFill>
-              </a:defRPr>
-            </a:pPr>
-          </a:p>
-          <a:p>
-            <a:pPr>
-              <a:spcBef>
-                <a:spcPts val="600"/>
-              </a:spcBef>
-              <a:spcAft>
-                <a:spcPts val="600"/>
-              </a:spcAft>
-              <a:defRPr sz="1800">
-                <a:solidFill>
-                  <a:srgbClr val="323232"/>
-                </a:solidFill>
-              </a:defRPr>
-            </a:pPr>
-            <a:r>
-              <a:t>3. Cloudflare Tunnel で公開</a:t>
-            </a:r>
-          </a:p>
-          <a:p>
-            <a:pPr lvl="1">
-              <a:spcBef>
-                <a:spcPts val="600"/>
-              </a:spcBef>
-              <a:spcAft>
-                <a:spcPts val="600"/>
-              </a:spcAft>
-              <a:defRPr sz="1600">
-                <a:solidFill>
-                  <a:srgbClr val="323232"/>
-                </a:solidFill>
-              </a:defRPr>
-            </a:pPr>
-            <a:r>
-              <a:t>cloudflared tunnel run pipecat</a:t>
-            </a:r>
-          </a:p>
-          <a:p>
-            <a:pPr>
-              <a:spcBef>
-                <a:spcPts val="600"/>
-              </a:spcBef>
-              <a:spcAft>
-                <a:spcPts val="600"/>
-              </a:spcAft>
-              <a:defRPr sz="1800">
-                <a:solidFill>
-                  <a:srgbClr val="323232"/>
-                </a:solidFill>
-              </a:defRPr>
-            </a:pPr>
-          </a:p>
-          <a:p>
-            <a:pPr>
-              <a:spcBef>
-                <a:spcPts val="600"/>
-              </a:spcBef>
-              <a:spcAft>
-                <a:spcPts val="600"/>
-              </a:spcAft>
-              <a:defRPr sz="1800">
-                <a:solidFill>
-                  <a:srgbClr val="323232"/>
-                </a:solidFill>
-              </a:defRPr>
-            </a:pPr>
-            <a:r>
-              <a:t>4. FastAPI サーバーを起動</a:t>
-            </a:r>
-          </a:p>
-          <a:p>
-            <a:pPr lvl="1">
-              <a:spcBef>
-                <a:spcPts val="600"/>
-              </a:spcBef>
-              <a:spcAft>
-                <a:spcPts val="600"/>
-              </a:spcAft>
-              <a:defRPr sz="1600">
-                <a:solidFill>
-                  <a:srgbClr val="323232"/>
-                </a:solidFill>
-              </a:defRPr>
-            </a:pPr>
-            <a:r>
-              <a:t>python server.py</a:t>
-            </a:r>
-          </a:p>
-          <a:p>
-            <a:pPr>
-              <a:spcBef>
-                <a:spcPts val="600"/>
-              </a:spcBef>
-              <a:spcAft>
-                <a:spcPts val="600"/>
-              </a:spcAft>
-              <a:defRPr sz="1800">
-                <a:solidFill>
-                  <a:srgbClr val="323232"/>
-                </a:solidFill>
-              </a:defRPr>
-            </a:pPr>
-          </a:p>
-          <a:p>
-            <a:pPr>
-              <a:spcBef>
-                <a:spcPts val="600"/>
-              </a:spcBef>
-              <a:spcAft>
-                <a:spcPts val="600"/>
-              </a:spcAft>
-              <a:defRPr sz="1800">
-                <a:solidFill>
-                  <a:srgbClr val="323232"/>
-                </a:solidFill>
-              </a:defRPr>
-            </a:pPr>
-            <a:r>
-              <a:t>5. ブラウザで Tunnel URL にアクセス</a:t>
-            </a:r>
-          </a:p>
-          <a:p>
-            <a:pPr>
-              <a:spcBef>
-                <a:spcPts val="600"/>
-              </a:spcBef>
-              <a:spcAft>
-                <a:spcPts val="600"/>
-              </a:spcAft>
-              <a:defRPr sz="1800">
-                <a:solidFill>
-                  <a:srgbClr val="323232"/>
-                </a:solidFill>
-              </a:defRPr>
-            </a:pPr>
-            <a:r>
-              <a:t>6. 「接続」ボタンをクリック → 音声対話開始</a:t>
-            </a:r>
-          </a:p>
-        </p:txBody>
-      </p:sp>
+      </p:pic>
     </p:spTree>
   </p:cSld>
   <p:clrMapOvr>
@@ -4294,7 +4004,7 @@
               </a:defRPr>
             </a:pPr>
             <a:r>
-              <a:t>パイプライン設定の詳細</a:t>
+              <a:t>依存関係とローカルモデル</a:t>
             </a:r>
           </a:p>
         </p:txBody>
@@ -4335,199 +4045,166 @@
               </a:defRPr>
             </a:pPr>
             <a:r>
-              <a:t>VAD (Voice Activity Detection):</a:t>
-            </a:r>
-          </a:p>
-          <a:p>
-            <a:pPr lvl="1">
-              <a:spcBef>
-                <a:spcPts val="600"/>
-              </a:spcBef>
-              <a:spcAft>
-                <a:spcPts val="600"/>
-              </a:spcAft>
-              <a:defRPr sz="1600">
-                <a:solidFill>
-                  <a:srgbClr val="323232"/>
-                </a:solidFill>
-              </a:defRPr>
-            </a:pPr>
-            <a:r>
-              <a:t>信頼度: 0.5</a:t>
-            </a:r>
-          </a:p>
-          <a:p>
-            <a:pPr lvl="1">
-              <a:spcBef>
-                <a:spcPts val="600"/>
-              </a:spcBef>
-              <a:spcAft>
-                <a:spcPts val="600"/>
-              </a:spcAft>
-              <a:defRPr sz="1600">
-                <a:solidFill>
-                  <a:srgbClr val="323232"/>
-                </a:solidFill>
-              </a:defRPr>
-            </a:pPr>
-            <a:r>
-              <a:t>音声開始: 0.2 秒</a:t>
-            </a:r>
-          </a:p>
-          <a:p>
-            <a:pPr lvl="1">
-              <a:spcBef>
-                <a:spcPts val="600"/>
-              </a:spcBef>
-              <a:spcAft>
-                <a:spcPts val="600"/>
-              </a:spcAft>
-              <a:defRPr sz="1600">
-                <a:solidFill>
-                  <a:srgbClr val="323232"/>
-                </a:solidFill>
-              </a:defRPr>
-            </a:pPr>
-            <a:r>
-              <a:t>無音判定: 0.2 秒</a:t>
-            </a:r>
-          </a:p>
-          <a:p>
-            <a:pPr lvl="1">
-              <a:spcBef>
-                <a:spcPts val="600"/>
-              </a:spcBef>
-              <a:spcAft>
-                <a:spcPts val="600"/>
-              </a:spcAft>
-              <a:defRPr sz="1600">
-                <a:solidFill>
-                  <a:srgbClr val="323232"/>
-                </a:solidFill>
-              </a:defRPr>
-            </a:pPr>
-            <a:r>
-              <a:t>アイドル: 1.0 秒</a:t>
-            </a:r>
-          </a:p>
-          <a:p>
-            <a:pPr>
-              <a:spcBef>
-                <a:spcPts val="600"/>
-              </a:spcBef>
-              <a:spcAft>
-                <a:spcPts val="600"/>
-              </a:spcAft>
-              <a:defRPr sz="1800">
-                <a:solidFill>
-                  <a:srgbClr val="323232"/>
-                </a:solidFill>
-              </a:defRPr>
-            </a:pPr>
-          </a:p>
-          <a:p>
-            <a:pPr>
-              <a:spcBef>
-                <a:spcPts val="600"/>
-              </a:spcBef>
-              <a:spcAft>
-                <a:spcPts val="600"/>
-              </a:spcAft>
-              <a:defRPr sz="1800">
-                <a:solidFill>
-                  <a:srgbClr val="323232"/>
-                </a:solidFill>
-              </a:defRPr>
-            </a:pPr>
-            <a:r>
-              <a:t>STT:</a:t>
-            </a:r>
-          </a:p>
-          <a:p>
-            <a:pPr lvl="1">
-              <a:spcBef>
-                <a:spcPts val="600"/>
-              </a:spcBef>
-              <a:spcAft>
-                <a:spcPts val="600"/>
-              </a:spcAft>
-              <a:defRPr sz="1600">
-                <a:solidFill>
-                  <a:srgbClr val="323232"/>
-                </a:solidFill>
-              </a:defRPr>
-            </a:pPr>
-            <a:r>
-              <a:t>言語: 日本語 (ja)</a:t>
-            </a:r>
-          </a:p>
-          <a:p>
-            <a:pPr lvl="1">
-              <a:spcBef>
-                <a:spcPts val="600"/>
-              </a:spcBef>
-              <a:spcAft>
-                <a:spcPts val="600"/>
-              </a:spcAft>
-              <a:defRPr sz="1600">
-                <a:solidFill>
-                  <a:srgbClr val="323232"/>
-                </a:solidFill>
-              </a:defRPr>
-            </a:pPr>
-            <a:r>
-              <a:t>no_speech_prob: 0.3 (無音判定を調整)</a:t>
-            </a:r>
-          </a:p>
-          <a:p>
-            <a:pPr>
-              <a:spcBef>
-                <a:spcPts val="600"/>
-              </a:spcBef>
-              <a:spcAft>
-                <a:spcPts val="600"/>
-              </a:spcAft>
-              <a:defRPr sz="1800">
-                <a:solidFill>
-                  <a:srgbClr val="323232"/>
-                </a:solidFill>
-              </a:defRPr>
-            </a:pPr>
-          </a:p>
-          <a:p>
-            <a:pPr>
-              <a:spcBef>
-                <a:spcPts val="600"/>
-              </a:spcBef>
-              <a:spcAft>
-                <a:spcPts val="600"/>
-              </a:spcAft>
-              <a:defRPr sz="1800">
-                <a:solidFill>
-                  <a:srgbClr val="323232"/>
-                </a:solidFill>
-              </a:defRPr>
-            </a:pPr>
-            <a:r>
-              <a:t>LLM:</a:t>
-            </a:r>
-          </a:p>
-          <a:p>
-            <a:pPr lvl="1">
-              <a:spcBef>
-                <a:spcPts val="600"/>
-              </a:spcBef>
-              <a:spcAft>
-                <a:spcPts val="600"/>
-              </a:spcAft>
-              <a:defRPr sz="1600">
-                <a:solidFill>
-                  <a:srgbClr val="323232"/>
-                </a:solidFill>
-              </a:defRPr>
-            </a:pPr>
-            <a:r>
-              <a:t>システムプロンプト: 日本語、簡潔、TTS対応</a:t>
+              <a:t>Python パッケージ:</a:t>
+            </a:r>
+          </a:p>
+          <a:p>
+            <a:pPr lvl="1">
+              <a:spcBef>
+                <a:spcPts val="600"/>
+              </a:spcBef>
+              <a:spcAft>
+                <a:spcPts val="600"/>
+              </a:spcAft>
+              <a:defRPr sz="1600">
+                <a:solidFill>
+                  <a:srgbClr val="323232"/>
+                </a:solidFill>
+              </a:defRPr>
+            </a:pPr>
+            <a:r>
+              <a:t>pipecat-ai: パイプライン・STT/TTS/LLM 統合</a:t>
+            </a:r>
+          </a:p>
+          <a:p>
+            <a:pPr lvl="1">
+              <a:spcBef>
+                <a:spcPts val="600"/>
+              </a:spcBef>
+              <a:spcAft>
+                <a:spcPts val="600"/>
+              </a:spcAft>
+              <a:defRPr sz="1600">
+                <a:solidFill>
+                  <a:srgbClr val="323232"/>
+                </a:solidFill>
+              </a:defRPr>
+            </a:pPr>
+            <a:r>
+              <a:t>vonage: Vonage Video/Voice API</a:t>
+            </a:r>
+          </a:p>
+          <a:p>
+            <a:pPr lvl="1">
+              <a:spcBef>
+                <a:spcPts val="600"/>
+              </a:spcBef>
+              <a:spcAft>
+                <a:spcPts val="600"/>
+              </a:spcAft>
+              <a:defRPr sz="1600">
+                <a:solidFill>
+                  <a:srgbClr val="323232"/>
+                </a:solidFill>
+              </a:defRPr>
+            </a:pPr>
+            <a:r>
+              <a:t>uvicorn: ASGI サーバー</a:t>
+            </a:r>
+          </a:p>
+          <a:p>
+            <a:pPr lvl="1">
+              <a:spcBef>
+                <a:spcPts val="600"/>
+              </a:spcBef>
+              <a:spcAft>
+                <a:spcPts val="600"/>
+              </a:spcAft>
+              <a:defRPr sz="1600">
+                <a:solidFill>
+                  <a:srgbClr val="323232"/>
+                </a:solidFill>
+              </a:defRPr>
+            </a:pPr>
+            <a:r>
+              <a:t>fastapi: Web フレームワーク</a:t>
+            </a:r>
+          </a:p>
+          <a:p>
+            <a:pPr>
+              <a:spcBef>
+                <a:spcPts val="600"/>
+              </a:spcBef>
+              <a:spcAft>
+                <a:spcPts val="600"/>
+              </a:spcAft>
+              <a:defRPr sz="1800">
+                <a:solidFill>
+                  <a:srgbClr val="323232"/>
+                </a:solidFill>
+              </a:defRPr>
+            </a:pPr>
+          </a:p>
+          <a:p>
+            <a:pPr>
+              <a:spcBef>
+                <a:spcPts val="600"/>
+              </a:spcBef>
+              <a:spcAft>
+                <a:spcPts val="600"/>
+              </a:spcAft>
+              <a:defRPr sz="1800">
+                <a:solidFill>
+                  <a:srgbClr val="323232"/>
+                </a:solidFill>
+              </a:defRPr>
+            </a:pPr>
+            <a:r>
+              <a:t>ローカルモデル (LM Studio 必須):</a:t>
+            </a:r>
+          </a:p>
+          <a:p>
+            <a:pPr lvl="1">
+              <a:spcBef>
+                <a:spcPts val="600"/>
+              </a:spcBef>
+              <a:spcAft>
+                <a:spcPts val="600"/>
+              </a:spcAft>
+              <a:defRPr sz="1600">
+                <a:solidFill>
+                  <a:srgbClr val="323232"/>
+                </a:solidFill>
+              </a:defRPr>
+            </a:pPr>
+            <a:r>
+              <a:t>LLM: Gemma/Llama 等 (ユーザー選択可能)</a:t>
+            </a:r>
+          </a:p>
+          <a:p>
+            <a:pPr lvl="1">
+              <a:spcBef>
+                <a:spcPts val="600"/>
+              </a:spcBef>
+              <a:spcAft>
+                <a:spcPts val="600"/>
+              </a:spcAft>
+              <a:defRPr sz="1600">
+                <a:solidFill>
+                  <a:srgbClr val="323232"/>
+                </a:solidFill>
+              </a:defRPr>
+            </a:pPr>
+            <a:r>
+              <a:t>STT: Whisper (LARGE_V3_TURBO_Q4 推奨)</a:t>
+            </a:r>
+          </a:p>
+          <a:p>
+            <a:pPr lvl="1">
+              <a:spcBef>
+                <a:spcPts val="600"/>
+              </a:spcBef>
+              <a:spcAft>
+                <a:spcPts val="600"/>
+              </a:spcAft>
+              <a:defRPr sz="1600">
+                <a:solidFill>
+                  <a:srgbClr val="323232"/>
+                </a:solidFill>
+              </a:defRPr>
+            </a:pPr>
+            <a:r>
+              <a:t>TTS: pyopenjtalk (HTS ベース)</a:t>
             </a:r>
           </a:p>
         </p:txBody>
@@ -4588,7 +4265,7 @@
               </a:defRPr>
             </a:pPr>
             <a:r>
-              <a:t>重要な技術的工夫</a:t>
+              <a:t>環境変数設定 (.env)</a:t>
             </a:r>
           </a:p>
         </p:txBody>
@@ -4629,181 +4306,166 @@
               </a:defRPr>
             </a:pPr>
             <a:r>
-              <a:t>1. 状態リセット (_reset_service):</a:t>
-            </a:r>
-          </a:p>
-          <a:p>
-            <a:pPr lvl="1">
-              <a:spcBef>
-                <a:spcPts val="600"/>
-              </a:spcBef>
-              <a:spcAft>
-                <a:spcPts val="600"/>
-              </a:spcAft>
-              <a:defRPr sz="1600">
-                <a:solidFill>
-                  <a:srgbClr val="323232"/>
-                </a:solidFill>
-              </a:defRPr>
-            </a:pPr>
-            <a:r>
-              <a:t>接続ごとに LLM/STT/TTS の内部状態をクリア</a:t>
-            </a:r>
-          </a:p>
-          <a:p>
-            <a:pPr lvl="1">
-              <a:spcBef>
-                <a:spcPts val="600"/>
-              </a:spcBef>
-              <a:spcAft>
-                <a:spcPts val="600"/>
-              </a:spcAft>
-              <a:defRPr sz="1600">
-                <a:solidFill>
-                  <a:srgbClr val="323232"/>
-                </a:solidFill>
-              </a:defRPr>
-            </a:pPr>
-            <a:r>
-              <a:t>複数接続での相互干渉を防止</a:t>
-            </a:r>
-          </a:p>
-          <a:p>
-            <a:pPr>
-              <a:spcBef>
-                <a:spcPts val="600"/>
-              </a:spcBef>
-              <a:spcAft>
-                <a:spcPts val="600"/>
-              </a:spcAft>
-              <a:defRPr sz="1800">
-                <a:solidFill>
-                  <a:srgbClr val="323232"/>
-                </a:solidFill>
-              </a:defRPr>
-            </a:pPr>
-          </a:p>
-          <a:p>
-            <a:pPr>
-              <a:spcBef>
-                <a:spcPts val="600"/>
-              </a:spcBef>
-              <a:spcAft>
-                <a:spcPts val="600"/>
-              </a:spcAft>
-              <a:defRPr sz="1800">
-                <a:solidFill>
-                  <a:srgbClr val="323232"/>
-                </a:solidFill>
-              </a:defRPr>
-            </a:pPr>
-            <a:r>
-              <a:t>2. Monkey-Patch (LLMAssistantAggregator):</a:t>
-            </a:r>
-          </a:p>
-          <a:p>
-            <a:pPr lvl="1">
-              <a:spcBef>
-                <a:spcPts val="600"/>
-              </a:spcBef>
-              <a:spcAft>
-                <a:spcPts val="600"/>
-              </a:spcAft>
-              <a:defRPr sz="1600">
-                <a:solidFill>
-                  <a:srgbClr val="323232"/>
-                </a:solidFill>
-              </a:defRPr>
-            </a:pPr>
-            <a:r>
-              <a:t>TextFrame を downstream に転送</a:t>
-            </a:r>
-          </a:p>
-          <a:p>
-            <a:pPr lvl="1">
-              <a:spcBef>
-                <a:spcPts val="600"/>
-              </a:spcBef>
-              <a:spcAft>
-                <a:spcPts val="600"/>
-              </a:spcAft>
-              <a:defRPr sz="1600">
-                <a:solidFill>
-                  <a:srgbClr val="323232"/>
-                </a:solidFill>
-              </a:defRPr>
-            </a:pPr>
-            <a:r>
-              <a:t>TTS が応答を受け取れるように修正</a:t>
-            </a:r>
-          </a:p>
-          <a:p>
-            <a:pPr>
-              <a:spcBef>
-                <a:spcPts val="600"/>
-              </a:spcBef>
-              <a:spcAft>
-                <a:spcPts val="600"/>
-              </a:spcAft>
-              <a:defRPr sz="1800">
-                <a:solidFill>
-                  <a:srgbClr val="323232"/>
-                </a:solidFill>
-              </a:defRPr>
-            </a:pPr>
-          </a:p>
-          <a:p>
-            <a:pPr>
-              <a:spcBef>
-                <a:spcPts val="600"/>
-              </a:spcBef>
-              <a:spcAft>
-                <a:spcPts val="600"/>
-              </a:spcAft>
-              <a:defRPr sz="1800">
-                <a:solidFill>
-                  <a:srgbClr val="323232"/>
-                </a:solidFill>
-              </a:defRPr>
-            </a:pPr>
-            <a:r>
-              <a:t>3. Audio Connector 管理:</a:t>
-            </a:r>
-          </a:p>
-          <a:p>
-            <a:pPr lvl="1">
-              <a:spcBef>
-                <a:spcPts val="600"/>
-              </a:spcBef>
-              <a:spcAft>
-                <a:spcPts val="600"/>
-              </a:spcAft>
-              <a:defRPr sz="1600">
-                <a:solidFill>
-                  <a:srgbClr val="323232"/>
-                </a:solidFill>
-              </a:defRPr>
-            </a:pPr>
-            <a:r>
-              <a:t>新接続時に古い connector を全て停止</a:t>
-            </a:r>
-          </a:p>
-          <a:p>
-            <a:pPr lvl="1">
-              <a:spcBef>
-                <a:spcPts val="600"/>
-              </a:spcBef>
-              <a:spcAft>
-                <a:spcPts val="600"/>
-              </a:spcAft>
-              <a:defRPr sz="1600">
-                <a:solidFill>
-                  <a:srgbClr val="323232"/>
-                </a:solidFill>
-              </a:defRPr>
-            </a:pPr>
-            <a:r>
-              <a:t>メモリリークを防止</a:t>
+              <a:t>LM Studio:</a:t>
+            </a:r>
+          </a:p>
+          <a:p>
+            <a:pPr lvl="1">
+              <a:spcBef>
+                <a:spcPts val="600"/>
+              </a:spcBef>
+              <a:spcAft>
+                <a:spcPts val="600"/>
+              </a:spcAft>
+              <a:defRPr sz="1600">
+                <a:solidFill>
+                  <a:srgbClr val="323232"/>
+                </a:solidFill>
+              </a:defRPr>
+            </a:pPr>
+            <a:r>
+              <a:t>LM_STUDIO_BASE_URL=http://localhost:1234/v1</a:t>
+            </a:r>
+          </a:p>
+          <a:p>
+            <a:pPr lvl="1">
+              <a:spcBef>
+                <a:spcPts val="600"/>
+              </a:spcBef>
+              <a:spcAft>
+                <a:spcPts val="600"/>
+              </a:spcAft>
+              <a:defRPr sz="1600">
+                <a:solidFill>
+                  <a:srgbClr val="323232"/>
+                </a:solidFill>
+              </a:defRPr>
+            </a:pPr>
+            <a:r>
+              <a:t>LM_MODEL=gemma-4-26B-A4B-it-MLX-8bit</a:t>
+            </a:r>
+          </a:p>
+          <a:p>
+            <a:pPr lvl="1">
+              <a:spcBef>
+                <a:spcPts val="600"/>
+              </a:spcBef>
+              <a:spcAft>
+                <a:spcPts val="600"/>
+              </a:spcAft>
+              <a:defRPr sz="1600">
+                <a:solidFill>
+                  <a:srgbClr val="323232"/>
+                </a:solidFill>
+              </a:defRPr>
+            </a:pPr>
+            <a:r>
+              <a:t>STT_LANGUAGE=ja</a:t>
+            </a:r>
+          </a:p>
+          <a:p>
+            <a:pPr>
+              <a:spcBef>
+                <a:spcPts val="600"/>
+              </a:spcBef>
+              <a:spcAft>
+                <a:spcPts val="600"/>
+              </a:spcAft>
+              <a:defRPr sz="1800">
+                <a:solidFill>
+                  <a:srgbClr val="323232"/>
+                </a:solidFill>
+              </a:defRPr>
+            </a:pPr>
+          </a:p>
+          <a:p>
+            <a:pPr>
+              <a:spcBef>
+                <a:spcPts val="600"/>
+              </a:spcBef>
+              <a:spcAft>
+                <a:spcPts val="600"/>
+              </a:spcAft>
+              <a:defRPr sz="1800">
+                <a:solidFill>
+                  <a:srgbClr val="323232"/>
+                </a:solidFill>
+              </a:defRPr>
+            </a:pPr>
+            <a:r>
+              <a:t>Vonage:</a:t>
+            </a:r>
+          </a:p>
+          <a:p>
+            <a:pPr lvl="1">
+              <a:spcBef>
+                <a:spcPts val="600"/>
+              </a:spcBef>
+              <a:spcAft>
+                <a:spcPts val="600"/>
+              </a:spcAft>
+              <a:defRPr sz="1600">
+                <a:solidFill>
+                  <a:srgbClr val="323232"/>
+                </a:solidFill>
+              </a:defRPr>
+            </a:pPr>
+            <a:r>
+              <a:t>VONAGE_APPLICATION_ID=&lt;your-app-id&gt;</a:t>
+            </a:r>
+          </a:p>
+          <a:p>
+            <a:pPr lvl="1">
+              <a:spcBef>
+                <a:spcPts val="600"/>
+              </a:spcBef>
+              <a:spcAft>
+                <a:spcPts val="600"/>
+              </a:spcAft>
+              <a:defRPr sz="1600">
+                <a:solidFill>
+                  <a:srgbClr val="323232"/>
+                </a:solidFill>
+              </a:defRPr>
+            </a:pPr>
+            <a:r>
+              <a:t>VONAGE_PRIVATE_KEY=&lt;path-or-raw-key&gt;</a:t>
+            </a:r>
+          </a:p>
+          <a:p>
+            <a:pPr lvl="1">
+              <a:spcBef>
+                <a:spcPts val="600"/>
+              </a:spcBef>
+              <a:spcAft>
+                <a:spcPts val="600"/>
+              </a:spcAft>
+              <a:defRPr sz="1600">
+                <a:solidFill>
+                  <a:srgbClr val="323232"/>
+                </a:solidFill>
+              </a:defRPr>
+            </a:pPr>
+            <a:r>
+              <a:t>VONAGE_AUDIO_RATE=16000</a:t>
+            </a:r>
+          </a:p>
+          <a:p>
+            <a:pPr lvl="1">
+              <a:spcBef>
+                <a:spcPts val="600"/>
+              </a:spcBef>
+              <a:spcAft>
+                <a:spcPts val="600"/>
+              </a:spcAft>
+              <a:defRPr sz="1600">
+                <a:solidFill>
+                  <a:srgbClr val="323232"/>
+                </a:solidFill>
+              </a:defRPr>
+            </a:pPr>
+            <a:r>
+              <a:t>WS_URI=wss://&lt;tunnel-url&gt;/ws (オプション)</a:t>
             </a:r>
           </a:p>
         </p:txBody>
@@ -4864,7 +4526,7 @@
               </a:defRPr>
             </a:pPr>
             <a:r>
-              <a:t>エラーハンドリング</a:t>
+              <a:t>起動手順</a:t>
             </a:r>
           </a:p>
         </p:txBody>
@@ -4905,199 +4567,211 @@
               </a:defRPr>
             </a:pPr>
             <a:r>
-              <a:t>サーバー側:</a:t>
-            </a:r>
-          </a:p>
-          <a:p>
-            <a:pPr lvl="1">
-              <a:spcBef>
-                <a:spcPts val="600"/>
-              </a:spcBef>
-              <a:spcAft>
-                <a:spcPts val="600"/>
-              </a:spcAft>
-              <a:defRPr sz="1600">
-                <a:solidFill>
-                  <a:srgbClr val="323232"/>
-                </a:solidFill>
-              </a:defRPr>
-            </a:pPr>
-            <a:r>
-              <a:t>WebSocket 切断 → finally で確実に cleanup</a:t>
-            </a:r>
-          </a:p>
-          <a:p>
-            <a:pPr lvl="1">
-              <a:spcBef>
-                <a:spcPts val="600"/>
-              </a:spcBef>
-              <a:spcAft>
-                <a:spcPts val="600"/>
-              </a:spcAft>
-              <a:defRPr sz="1600">
-                <a:solidFill>
-                  <a:srgbClr val="323232"/>
-                </a:solidFill>
-              </a:defRPr>
-            </a:pPr>
-            <a:r>
-              <a:t>モデル読み込み失敗 → ログして続行 (実行時エラー)</a:t>
-            </a:r>
-          </a:p>
-          <a:p>
-            <a:pPr lvl="1">
-              <a:spcBef>
-                <a:spcPts val="600"/>
-              </a:spcBef>
-              <a:spcAft>
-                <a:spcPts val="600"/>
-              </a:spcAft>
-              <a:defRPr sz="1600">
-                <a:solidFill>
-                  <a:srgbClr val="323232"/>
-                </a:solidFill>
-              </a:defRPr>
-            </a:pPr>
-            <a:r>
-              <a:t>Connector 停止失敗 → warning ログのみ</a:t>
-            </a:r>
-          </a:p>
-          <a:p>
-            <a:pPr>
-              <a:spcBef>
-                <a:spcPts val="600"/>
-              </a:spcBef>
-              <a:spcAft>
-                <a:spcPts val="600"/>
-              </a:spcAft>
-              <a:defRPr sz="1800">
-                <a:solidFill>
-                  <a:srgbClr val="323232"/>
-                </a:solidFill>
-              </a:defRPr>
-            </a:pPr>
-          </a:p>
-          <a:p>
-            <a:pPr>
-              <a:spcBef>
-                <a:spcPts val="600"/>
-              </a:spcBef>
-              <a:spcAft>
-                <a:spcPts val="600"/>
-              </a:spcAft>
-              <a:defRPr sz="1800">
-                <a:solidFill>
-                  <a:srgbClr val="323232"/>
-                </a:solidFill>
-              </a:defRPr>
-            </a:pPr>
-            <a:r>
-              <a:t>パイプライン側:</a:t>
-            </a:r>
-          </a:p>
-          <a:p>
-            <a:pPr lvl="1">
-              <a:spcBef>
-                <a:spcPts val="600"/>
-              </a:spcBef>
-              <a:spcAft>
-                <a:spcPts val="600"/>
-              </a:spcAft>
-              <a:defRPr sz="1600">
-                <a:solidFill>
-                  <a:srgbClr val="323232"/>
-                </a:solidFill>
-              </a:defRPr>
-            </a:pPr>
-            <a:r>
-              <a:t>STT タイムアウト → _ttfb_timeout_task を cancel</a:t>
-            </a:r>
-          </a:p>
-          <a:p>
-            <a:pPr lvl="1">
-              <a:spcBef>
-                <a:spcPts val="600"/>
-              </a:spcBef>
-              <a:spcAft>
-                <a:spcPts val="600"/>
-              </a:spcAft>
-              <a:defRPr sz="1600">
-                <a:solidFill>
-                  <a:srgbClr val="323232"/>
-                </a:solidFill>
-              </a:defRPr>
-            </a:pPr>
-            <a:r>
-              <a:t>LLM エラー → exception ログ → セッション終了</a:t>
-            </a:r>
-          </a:p>
-          <a:p>
-            <a:pPr>
-              <a:spcBef>
-                <a:spcPts val="600"/>
-              </a:spcBef>
-              <a:spcAft>
-                <a:spcPts val="600"/>
-              </a:spcAft>
-              <a:defRPr sz="1800">
-                <a:solidFill>
-                  <a:srgbClr val="323232"/>
-                </a:solidFill>
-              </a:defRPr>
-            </a:pPr>
-          </a:p>
-          <a:p>
-            <a:pPr>
-              <a:spcBef>
-                <a:spcPts val="600"/>
-              </a:spcBef>
-              <a:spcAft>
-                <a:spcPts val="600"/>
-              </a:spcAft>
-              <a:defRPr sz="1800">
-                <a:solidFill>
-                  <a:srgbClr val="323232"/>
-                </a:solidFill>
-              </a:defRPr>
-            </a:pPr>
-            <a:r>
-              <a:t>ブラウザ側:</a:t>
-            </a:r>
-          </a:p>
-          <a:p>
-            <a:pPr lvl="1">
-              <a:spcBef>
-                <a:spcPts val="600"/>
-              </a:spcBef>
-              <a:spcAft>
-                <a:spcPts val="600"/>
-              </a:spcAft>
-              <a:defRPr sz="1600">
-                <a:solidFill>
-                  <a:srgbClr val="323232"/>
-                </a:solidFill>
-              </a:defRPr>
-            </a:pPr>
-            <a:r>
-              <a:t>接続失敗 → UI に状態表示</a:t>
-            </a:r>
-          </a:p>
-          <a:p>
-            <a:pPr lvl="1">
-              <a:spcBef>
-                <a:spcPts val="600"/>
-              </a:spcBef>
-              <a:spcAft>
-                <a:spcPts val="600"/>
-              </a:spcAft>
-              <a:defRPr sz="1600">
-                <a:solidFill>
-                  <a:srgbClr val="323232"/>
-                </a:solidFill>
-              </a:defRPr>
-            </a:pPr>
-            <a:r>
-              <a:t>ストリーム受信失敗 → ログのみ (UI継続)</a:t>
+              <a:t>1. LM Studio を localhost:1234 で起動</a:t>
+            </a:r>
+          </a:p>
+          <a:p>
+            <a:pPr lvl="1">
+              <a:spcBef>
+                <a:spcPts val="600"/>
+              </a:spcBef>
+              <a:spcAft>
+                <a:spcPts val="600"/>
+              </a:spcAft>
+              <a:defRPr sz="1600">
+                <a:solidFill>
+                  <a:srgbClr val="323232"/>
+                </a:solidFill>
+              </a:defRPr>
+            </a:pPr>
+            <a:r>
+              <a:t>モデルをロード (Gemma/Llama など)</a:t>
+            </a:r>
+          </a:p>
+          <a:p>
+            <a:pPr>
+              <a:spcBef>
+                <a:spcPts val="600"/>
+              </a:spcBef>
+              <a:spcAft>
+                <a:spcPts val="600"/>
+              </a:spcAft>
+              <a:defRPr sz="1800">
+                <a:solidFill>
+                  <a:srgbClr val="323232"/>
+                </a:solidFill>
+              </a:defRPr>
+            </a:pPr>
+          </a:p>
+          <a:p>
+            <a:pPr>
+              <a:spcBef>
+                <a:spcPts val="600"/>
+              </a:spcBef>
+              <a:spcAft>
+                <a:spcPts val="600"/>
+              </a:spcAft>
+              <a:defRPr sz="1800">
+                <a:solidFill>
+                  <a:srgbClr val="323232"/>
+                </a:solidFill>
+              </a:defRPr>
+            </a:pPr>
+            <a:r>
+              <a:t>2. リポジトリを .env ファイルで設定</a:t>
+            </a:r>
+          </a:p>
+          <a:p>
+            <a:pPr>
+              <a:spcBef>
+                <a:spcPts val="600"/>
+              </a:spcBef>
+              <a:spcAft>
+                <a:spcPts val="600"/>
+              </a:spcAft>
+              <a:defRPr sz="1800">
+                <a:solidFill>
+                  <a:srgbClr val="323232"/>
+                </a:solidFill>
+              </a:defRPr>
+            </a:pPr>
+          </a:p>
+          <a:p>
+            <a:pPr>
+              <a:spcBef>
+                <a:spcPts val="600"/>
+              </a:spcBef>
+              <a:spcAft>
+                <a:spcPts val="600"/>
+              </a:spcAft>
+              <a:defRPr sz="1800">
+                <a:solidFill>
+                  <a:srgbClr val="323232"/>
+                </a:solidFill>
+              </a:defRPr>
+            </a:pPr>
+            <a:r>
+              <a:t>3. Cloudflare Tunnel で公開</a:t>
+            </a:r>
+          </a:p>
+          <a:p>
+            <a:pPr lvl="1">
+              <a:spcBef>
+                <a:spcPts val="600"/>
+              </a:spcBef>
+              <a:spcAft>
+                <a:spcPts val="600"/>
+              </a:spcAft>
+              <a:defRPr sz="1600">
+                <a:solidFill>
+                  <a:srgbClr val="323232"/>
+                </a:solidFill>
+              </a:defRPr>
+            </a:pPr>
+            <a:r>
+              <a:t>cloudflared tunnel run pipecat</a:t>
+            </a:r>
+          </a:p>
+          <a:p>
+            <a:pPr>
+              <a:spcBef>
+                <a:spcPts val="600"/>
+              </a:spcBef>
+              <a:spcAft>
+                <a:spcPts val="600"/>
+              </a:spcAft>
+              <a:defRPr sz="1800">
+                <a:solidFill>
+                  <a:srgbClr val="323232"/>
+                </a:solidFill>
+              </a:defRPr>
+            </a:pPr>
+          </a:p>
+          <a:p>
+            <a:pPr>
+              <a:spcBef>
+                <a:spcPts val="600"/>
+              </a:spcBef>
+              <a:spcAft>
+                <a:spcPts val="600"/>
+              </a:spcAft>
+              <a:defRPr sz="1800">
+                <a:solidFill>
+                  <a:srgbClr val="323232"/>
+                </a:solidFill>
+              </a:defRPr>
+            </a:pPr>
+            <a:r>
+              <a:t>4. FastAPI サーバーを起動</a:t>
+            </a:r>
+          </a:p>
+          <a:p>
+            <a:pPr lvl="1">
+              <a:spcBef>
+                <a:spcPts val="600"/>
+              </a:spcBef>
+              <a:spcAft>
+                <a:spcPts val="600"/>
+              </a:spcAft>
+              <a:defRPr sz="1600">
+                <a:solidFill>
+                  <a:srgbClr val="323232"/>
+                </a:solidFill>
+              </a:defRPr>
+            </a:pPr>
+            <a:r>
+              <a:t>python server.py</a:t>
+            </a:r>
+          </a:p>
+          <a:p>
+            <a:pPr>
+              <a:spcBef>
+                <a:spcPts val="600"/>
+              </a:spcBef>
+              <a:spcAft>
+                <a:spcPts val="600"/>
+              </a:spcAft>
+              <a:defRPr sz="1800">
+                <a:solidFill>
+                  <a:srgbClr val="323232"/>
+                </a:solidFill>
+              </a:defRPr>
+            </a:pPr>
+          </a:p>
+          <a:p>
+            <a:pPr>
+              <a:spcBef>
+                <a:spcPts val="600"/>
+              </a:spcBef>
+              <a:spcAft>
+                <a:spcPts val="600"/>
+              </a:spcAft>
+              <a:defRPr sz="1800">
+                <a:solidFill>
+                  <a:srgbClr val="323232"/>
+                </a:solidFill>
+              </a:defRPr>
+            </a:pPr>
+            <a:r>
+              <a:t>5. ブラウザで Tunnel URL にアクセス</a:t>
+            </a:r>
+          </a:p>
+          <a:p>
+            <a:pPr>
+              <a:spcBef>
+                <a:spcPts val="600"/>
+              </a:spcBef>
+              <a:spcAft>
+                <a:spcPts val="600"/>
+              </a:spcAft>
+              <a:defRPr sz="1800">
+                <a:solidFill>
+                  <a:srgbClr val="323232"/>
+                </a:solidFill>
+              </a:defRPr>
+            </a:pPr>
+            <a:r>
+              <a:t>6. 「接続」ボタンをクリック → 音声対話開始</a:t>
             </a:r>
           </a:p>
         </p:txBody>
@@ -5158,7 +4832,7 @@
               </a:defRPr>
             </a:pPr>
             <a:r>
-              <a:t>パフォーマンス・最適化</a:t>
+              <a:t>パイプライン設定の詳細</a:t>
             </a:r>
           </a:p>
         </p:txBody>
@@ -5199,214 +4873,199 @@
               </a:defRPr>
             </a:pPr>
             <a:r>
-              <a:t>モデル事前読み込み:</a:t>
-            </a:r>
-          </a:p>
-          <a:p>
-            <a:pPr lvl="1">
-              <a:spcBef>
-                <a:spcPts val="600"/>
-              </a:spcBef>
-              <a:spcAft>
-                <a:spcPts val="600"/>
-              </a:spcAft>
-              <a:defRPr sz="1600">
-                <a:solidFill>
-                  <a:srgbClr val="323232"/>
-                </a:solidFill>
-              </a:defRPr>
-            </a:pPr>
-            <a:r>
-              <a:t>サーバー起動時に preload_models() で全モデルをメモリ展開</a:t>
-            </a:r>
-          </a:p>
-          <a:p>
-            <a:pPr lvl="1">
-              <a:spcBef>
-                <a:spcPts val="600"/>
-              </a:spcBef>
-              <a:spcAft>
-                <a:spcPts val="600"/>
-              </a:spcAft>
-              <a:defRPr sz="1600">
-                <a:solidFill>
-                  <a:srgbClr val="323232"/>
-                </a:solidFill>
-              </a:defRPr>
-            </a:pPr>
-            <a:r>
-              <a:t>初回接続の遅延を排除</a:t>
-            </a:r>
-          </a:p>
-          <a:p>
-            <a:pPr>
-              <a:spcBef>
-                <a:spcPts val="600"/>
-              </a:spcBef>
-              <a:spcAft>
-                <a:spcPts val="600"/>
-              </a:spcAft>
-              <a:defRPr sz="1800">
-                <a:solidFill>
-                  <a:srgbClr val="323232"/>
-                </a:solidFill>
-              </a:defRPr>
-            </a:pPr>
-          </a:p>
-          <a:p>
-            <a:pPr>
-              <a:spcBef>
-                <a:spcPts val="600"/>
-              </a:spcBef>
-              <a:spcAft>
-                <a:spcPts val="600"/>
-              </a:spcAft>
-              <a:defRPr sz="1800">
-                <a:solidFill>
-                  <a:srgbClr val="323232"/>
-                </a:solidFill>
-              </a:defRPr>
-            </a:pPr>
-            <a:r>
-              <a:t>Whisper MLX:</a:t>
-            </a:r>
-          </a:p>
-          <a:p>
-            <a:pPr lvl="1">
-              <a:spcBef>
-                <a:spcPts val="600"/>
-              </a:spcBef>
-              <a:spcAft>
-                <a:spcPts val="600"/>
-              </a:spcAft>
-              <a:defRPr sz="1600">
-                <a:solidFill>
-                  <a:srgbClr val="323232"/>
-                </a:solidFill>
-              </a:defRPr>
-            </a:pPr>
-            <a:r>
-              <a:t>LARGE_V3_TURBO_Q4: 高速、高精度（Gemini 推奨）</a:t>
-            </a:r>
-          </a:p>
-          <a:p>
-            <a:pPr>
-              <a:spcBef>
-                <a:spcPts val="600"/>
-              </a:spcBef>
-              <a:spcAft>
-                <a:spcPts val="600"/>
-              </a:spcAft>
-              <a:defRPr sz="1800">
-                <a:solidFill>
-                  <a:srgbClr val="323232"/>
-                </a:solidFill>
-              </a:defRPr>
-            </a:pPr>
-          </a:p>
-          <a:p>
-            <a:pPr>
-              <a:spcBef>
-                <a:spcPts val="600"/>
-              </a:spcBef>
-              <a:spcAft>
-                <a:spcPts val="600"/>
-              </a:spcAft>
-              <a:defRPr sz="1800">
-                <a:solidFill>
-                  <a:srgbClr val="323232"/>
-                </a:solidFill>
-              </a:defRPr>
-            </a:pPr>
-            <a:r>
-              <a:t>非同期処理:</a:t>
-            </a:r>
-          </a:p>
-          <a:p>
-            <a:pPr lvl="1">
-              <a:spcBef>
-                <a:spcPts val="600"/>
-              </a:spcBef>
-              <a:spcAft>
-                <a:spcPts val="600"/>
-              </a:spcAft>
-              <a:defRPr sz="1600">
-                <a:solidFill>
-                  <a:srgbClr val="323232"/>
-                </a:solidFill>
-              </a:defRPr>
-            </a:pPr>
-            <a:r>
-              <a:t>asyncio で I/O ブロッキング回避</a:t>
-            </a:r>
-          </a:p>
-          <a:p>
-            <a:pPr lvl="1">
-              <a:spcBef>
-                <a:spcPts val="600"/>
-              </a:spcBef>
-              <a:spcAft>
-                <a:spcPts val="600"/>
-              </a:spcAft>
-              <a:defRPr sz="1600">
-                <a:solidFill>
-                  <a:srgbClr val="323232"/>
-                </a:solidFill>
-              </a:defRPr>
-            </a:pPr>
-            <a:r>
-              <a:t>並列処理で低遅延を実現</a:t>
-            </a:r>
-          </a:p>
-          <a:p>
-            <a:pPr>
-              <a:spcBef>
-                <a:spcPts val="600"/>
-              </a:spcBef>
-              <a:spcAft>
-                <a:spcPts val="600"/>
-              </a:spcAft>
-              <a:defRPr sz="1800">
-                <a:solidFill>
-                  <a:srgbClr val="323232"/>
-                </a:solidFill>
-              </a:defRPr>
-            </a:pPr>
-          </a:p>
-          <a:p>
-            <a:pPr>
-              <a:spcBef>
-                <a:spcPts val="600"/>
-              </a:spcBef>
-              <a:spcAft>
-                <a:spcPts val="600"/>
-              </a:spcAft>
-              <a:defRPr sz="1800">
-                <a:solidFill>
-                  <a:srgbClr val="323232"/>
-                </a:solidFill>
-              </a:defRPr>
-            </a:pPr>
-            <a:r>
-              <a:t>グリーティング戦略:</a:t>
-            </a:r>
-          </a:p>
-          <a:p>
-            <a:pPr lvl="1">
-              <a:spcBef>
-                <a:spcPts val="600"/>
-              </a:spcBef>
-              <a:spcAft>
-                <a:spcPts val="600"/>
-              </a:spcAft>
-              <a:defRPr sz="1600">
-                <a:solidFill>
-                  <a:srgbClr val="323232"/>
-                </a:solidFill>
-              </a:defRPr>
-            </a:pPr>
-            <a:r>
-              <a:t>即時 + 遅延の2つで ネットワーク遅延対応</a:t>
+              <a:t>VAD (Voice Activity Detection):</a:t>
+            </a:r>
+          </a:p>
+          <a:p>
+            <a:pPr lvl="1">
+              <a:spcBef>
+                <a:spcPts val="600"/>
+              </a:spcBef>
+              <a:spcAft>
+                <a:spcPts val="600"/>
+              </a:spcAft>
+              <a:defRPr sz="1600">
+                <a:solidFill>
+                  <a:srgbClr val="323232"/>
+                </a:solidFill>
+              </a:defRPr>
+            </a:pPr>
+            <a:r>
+              <a:t>信頼度: 0.5</a:t>
+            </a:r>
+          </a:p>
+          <a:p>
+            <a:pPr lvl="1">
+              <a:spcBef>
+                <a:spcPts val="600"/>
+              </a:spcBef>
+              <a:spcAft>
+                <a:spcPts val="600"/>
+              </a:spcAft>
+              <a:defRPr sz="1600">
+                <a:solidFill>
+                  <a:srgbClr val="323232"/>
+                </a:solidFill>
+              </a:defRPr>
+            </a:pPr>
+            <a:r>
+              <a:t>音声開始: 0.2 秒</a:t>
+            </a:r>
+          </a:p>
+          <a:p>
+            <a:pPr lvl="1">
+              <a:spcBef>
+                <a:spcPts val="600"/>
+              </a:spcBef>
+              <a:spcAft>
+                <a:spcPts val="600"/>
+              </a:spcAft>
+              <a:defRPr sz="1600">
+                <a:solidFill>
+                  <a:srgbClr val="323232"/>
+                </a:solidFill>
+              </a:defRPr>
+            </a:pPr>
+            <a:r>
+              <a:t>無音判定: 0.2 秒</a:t>
+            </a:r>
+          </a:p>
+          <a:p>
+            <a:pPr lvl="1">
+              <a:spcBef>
+                <a:spcPts val="600"/>
+              </a:spcBef>
+              <a:spcAft>
+                <a:spcPts val="600"/>
+              </a:spcAft>
+              <a:defRPr sz="1600">
+                <a:solidFill>
+                  <a:srgbClr val="323232"/>
+                </a:solidFill>
+              </a:defRPr>
+            </a:pPr>
+            <a:r>
+              <a:t>アイドル: 1.0 秒</a:t>
+            </a:r>
+          </a:p>
+          <a:p>
+            <a:pPr>
+              <a:spcBef>
+                <a:spcPts val="600"/>
+              </a:spcBef>
+              <a:spcAft>
+                <a:spcPts val="600"/>
+              </a:spcAft>
+              <a:defRPr sz="1800">
+                <a:solidFill>
+                  <a:srgbClr val="323232"/>
+                </a:solidFill>
+              </a:defRPr>
+            </a:pPr>
+          </a:p>
+          <a:p>
+            <a:pPr>
+              <a:spcBef>
+                <a:spcPts val="600"/>
+              </a:spcBef>
+              <a:spcAft>
+                <a:spcPts val="600"/>
+              </a:spcAft>
+              <a:defRPr sz="1800">
+                <a:solidFill>
+                  <a:srgbClr val="323232"/>
+                </a:solidFill>
+              </a:defRPr>
+            </a:pPr>
+            <a:r>
+              <a:t>STT:</a:t>
+            </a:r>
+          </a:p>
+          <a:p>
+            <a:pPr lvl="1">
+              <a:spcBef>
+                <a:spcPts val="600"/>
+              </a:spcBef>
+              <a:spcAft>
+                <a:spcPts val="600"/>
+              </a:spcAft>
+              <a:defRPr sz="1600">
+                <a:solidFill>
+                  <a:srgbClr val="323232"/>
+                </a:solidFill>
+              </a:defRPr>
+            </a:pPr>
+            <a:r>
+              <a:t>言語: 日本語 (ja)</a:t>
+            </a:r>
+          </a:p>
+          <a:p>
+            <a:pPr lvl="1">
+              <a:spcBef>
+                <a:spcPts val="600"/>
+              </a:spcBef>
+              <a:spcAft>
+                <a:spcPts val="600"/>
+              </a:spcAft>
+              <a:defRPr sz="1600">
+                <a:solidFill>
+                  <a:srgbClr val="323232"/>
+                </a:solidFill>
+              </a:defRPr>
+            </a:pPr>
+            <a:r>
+              <a:t>no_speech_prob: 0.3 (無音判定を調整)</a:t>
+            </a:r>
+          </a:p>
+          <a:p>
+            <a:pPr>
+              <a:spcBef>
+                <a:spcPts val="600"/>
+              </a:spcBef>
+              <a:spcAft>
+                <a:spcPts val="600"/>
+              </a:spcAft>
+              <a:defRPr sz="1800">
+                <a:solidFill>
+                  <a:srgbClr val="323232"/>
+                </a:solidFill>
+              </a:defRPr>
+            </a:pPr>
+          </a:p>
+          <a:p>
+            <a:pPr>
+              <a:spcBef>
+                <a:spcPts val="600"/>
+              </a:spcBef>
+              <a:spcAft>
+                <a:spcPts val="600"/>
+              </a:spcAft>
+              <a:defRPr sz="1800">
+                <a:solidFill>
+                  <a:srgbClr val="323232"/>
+                </a:solidFill>
+              </a:defRPr>
+            </a:pPr>
+            <a:r>
+              <a:t>LLM:</a:t>
+            </a:r>
+          </a:p>
+          <a:p>
+            <a:pPr lvl="1">
+              <a:spcBef>
+                <a:spcPts val="600"/>
+              </a:spcBef>
+              <a:spcAft>
+                <a:spcPts val="600"/>
+              </a:spcAft>
+              <a:defRPr sz="1600">
+                <a:solidFill>
+                  <a:srgbClr val="323232"/>
+                </a:solidFill>
+              </a:defRPr>
+            </a:pPr>
+            <a:r>
+              <a:t>システムプロンプト: 日本語、簡潔、TTS対応</a:t>
             </a:r>
           </a:p>
         </p:txBody>
@@ -5467,7 +5126,7 @@
               </a:defRPr>
             </a:pPr>
             <a:r>
-              <a:t>セキュリティ考慮事項</a:t>
+              <a:t>重要な技術的工夫</a:t>
             </a:r>
           </a:p>
         </p:txBody>
@@ -5508,181 +5167,181 @@
               </a:defRPr>
             </a:pPr>
             <a:r>
-              <a:t>プライバシー:</a:t>
-            </a:r>
-          </a:p>
-          <a:p>
-            <a:pPr lvl="1">
-              <a:spcBef>
-                <a:spcPts val="600"/>
-              </a:spcBef>
-              <a:spcAft>
-                <a:spcPts val="600"/>
-              </a:spcAft>
-              <a:defRPr sz="1600">
-                <a:solidFill>
-                  <a:srgbClr val="323232"/>
-                </a:solidFill>
-              </a:defRPr>
-            </a:pPr>
-            <a:r>
-              <a:t>全処理がローカルで実行 → データ外部送信なし</a:t>
-            </a:r>
-          </a:p>
-          <a:p>
-            <a:pPr lvl="1">
-              <a:spcBef>
-                <a:spcPts val="600"/>
-              </a:spcBef>
-              <a:spcAft>
-                <a:spcPts val="600"/>
-              </a:spcAft>
-              <a:defRPr sz="1600">
-                <a:solidFill>
-                  <a:srgbClr val="323232"/>
-                </a:solidFill>
-              </a:defRPr>
-            </a:pPr>
-            <a:r>
-              <a:t>LLM・STT・TTS は LM Studio で実行</a:t>
-            </a:r>
-          </a:p>
-          <a:p>
-            <a:pPr>
-              <a:spcBef>
-                <a:spcPts val="600"/>
-              </a:spcBef>
-              <a:spcAft>
-                <a:spcPts val="600"/>
-              </a:spcAft>
-              <a:defRPr sz="1800">
-                <a:solidFill>
-                  <a:srgbClr val="323232"/>
-                </a:solidFill>
-              </a:defRPr>
-            </a:pPr>
-          </a:p>
-          <a:p>
-            <a:pPr>
-              <a:spcBef>
-                <a:spcPts val="600"/>
-              </a:spcBef>
-              <a:spcAft>
-                <a:spcPts val="600"/>
-              </a:spcAft>
-              <a:defRPr sz="1800">
-                <a:solidFill>
-                  <a:srgbClr val="323232"/>
-                </a:solidFill>
-              </a:defRPr>
-            </a:pPr>
-            <a:r>
-              <a:t>認証・認可:</a:t>
-            </a:r>
-          </a:p>
-          <a:p>
-            <a:pPr lvl="1">
-              <a:spcBef>
-                <a:spcPts val="600"/>
-              </a:spcBef>
-              <a:spcAft>
-                <a:spcPts val="600"/>
-              </a:spcAft>
-              <a:defRPr sz="1600">
-                <a:solidFill>
-                  <a:srgbClr val="323232"/>
-                </a:solidFill>
-              </a:defRPr>
-            </a:pPr>
-            <a:r>
-              <a:t>Vonage API は SDK で認証 (private key 管理)</a:t>
-            </a:r>
-          </a:p>
-          <a:p>
-            <a:pPr lvl="1">
-              <a:spcBef>
-                <a:spcPts val="600"/>
-              </a:spcBef>
-              <a:spcAft>
-                <a:spcPts val="600"/>
-              </a:spcAft>
-              <a:defRPr sz="1600">
-                <a:solidFill>
-                  <a:srgbClr val="323232"/>
-                </a:solidFill>
-              </a:defRPr>
-            </a:pPr>
-            <a:r>
-              <a:t>環境変数で秘密情報を管理 (.env)</a:t>
-            </a:r>
-          </a:p>
-          <a:p>
-            <a:pPr>
-              <a:spcBef>
-                <a:spcPts val="600"/>
-              </a:spcBef>
-              <a:spcAft>
-                <a:spcPts val="600"/>
-              </a:spcAft>
-              <a:defRPr sz="1800">
-                <a:solidFill>
-                  <a:srgbClr val="323232"/>
-                </a:solidFill>
-              </a:defRPr>
-            </a:pPr>
-          </a:p>
-          <a:p>
-            <a:pPr>
-              <a:spcBef>
-                <a:spcPts val="600"/>
-              </a:spcBef>
-              <a:spcAft>
-                <a:spcPts val="600"/>
-              </a:spcAft>
-              <a:defRPr sz="1800">
-                <a:solidFill>
-                  <a:srgbClr val="323232"/>
-                </a:solidFill>
-              </a:defRPr>
-            </a:pPr>
-            <a:r>
-              <a:t>通信:</a:t>
-            </a:r>
-          </a:p>
-          <a:p>
-            <a:pPr lvl="1">
-              <a:spcBef>
-                <a:spcPts val="600"/>
-              </a:spcBef>
-              <a:spcAft>
-                <a:spcPts val="600"/>
-              </a:spcAft>
-              <a:defRPr sz="1600">
-                <a:solidFill>
-                  <a:srgbClr val="323232"/>
-                </a:solidFill>
-              </a:defRPr>
-            </a:pPr>
-            <a:r>
-              <a:t>Tunnel URL は HTTPS/WSS で暗号化</a:t>
-            </a:r>
-          </a:p>
-          <a:p>
-            <a:pPr lvl="1">
-              <a:spcBef>
-                <a:spcPts val="600"/>
-              </a:spcBef>
-              <a:spcAft>
-                <a:spcPts val="600"/>
-              </a:spcAft>
-              <a:defRPr sz="1600">
-                <a:solidFill>
-                  <a:srgbClr val="323232"/>
-                </a:solidFill>
-              </a:defRPr>
-            </a:pPr>
-            <a:r>
-              <a:t>WebSocket は binary protocol で効率的</a:t>
+              <a:t>1. 状態リセット (_reset_service):</a:t>
+            </a:r>
+          </a:p>
+          <a:p>
+            <a:pPr lvl="1">
+              <a:spcBef>
+                <a:spcPts val="600"/>
+              </a:spcBef>
+              <a:spcAft>
+                <a:spcPts val="600"/>
+              </a:spcAft>
+              <a:defRPr sz="1600">
+                <a:solidFill>
+                  <a:srgbClr val="323232"/>
+                </a:solidFill>
+              </a:defRPr>
+            </a:pPr>
+            <a:r>
+              <a:t>接続ごとに LLM/STT/TTS の内部状態をクリア</a:t>
+            </a:r>
+          </a:p>
+          <a:p>
+            <a:pPr lvl="1">
+              <a:spcBef>
+                <a:spcPts val="600"/>
+              </a:spcBef>
+              <a:spcAft>
+                <a:spcPts val="600"/>
+              </a:spcAft>
+              <a:defRPr sz="1600">
+                <a:solidFill>
+                  <a:srgbClr val="323232"/>
+                </a:solidFill>
+              </a:defRPr>
+            </a:pPr>
+            <a:r>
+              <a:t>複数接続での相互干渉を防止</a:t>
+            </a:r>
+          </a:p>
+          <a:p>
+            <a:pPr>
+              <a:spcBef>
+                <a:spcPts val="600"/>
+              </a:spcBef>
+              <a:spcAft>
+                <a:spcPts val="600"/>
+              </a:spcAft>
+              <a:defRPr sz="1800">
+                <a:solidFill>
+                  <a:srgbClr val="323232"/>
+                </a:solidFill>
+              </a:defRPr>
+            </a:pPr>
+          </a:p>
+          <a:p>
+            <a:pPr>
+              <a:spcBef>
+                <a:spcPts val="600"/>
+              </a:spcBef>
+              <a:spcAft>
+                <a:spcPts val="600"/>
+              </a:spcAft>
+              <a:defRPr sz="1800">
+                <a:solidFill>
+                  <a:srgbClr val="323232"/>
+                </a:solidFill>
+              </a:defRPr>
+            </a:pPr>
+            <a:r>
+              <a:t>2. Monkey-Patch (LLMAssistantAggregator):</a:t>
+            </a:r>
+          </a:p>
+          <a:p>
+            <a:pPr lvl="1">
+              <a:spcBef>
+                <a:spcPts val="600"/>
+              </a:spcBef>
+              <a:spcAft>
+                <a:spcPts val="600"/>
+              </a:spcAft>
+              <a:defRPr sz="1600">
+                <a:solidFill>
+                  <a:srgbClr val="323232"/>
+                </a:solidFill>
+              </a:defRPr>
+            </a:pPr>
+            <a:r>
+              <a:t>TextFrame を downstream に転送</a:t>
+            </a:r>
+          </a:p>
+          <a:p>
+            <a:pPr lvl="1">
+              <a:spcBef>
+                <a:spcPts val="600"/>
+              </a:spcBef>
+              <a:spcAft>
+                <a:spcPts val="600"/>
+              </a:spcAft>
+              <a:defRPr sz="1600">
+                <a:solidFill>
+                  <a:srgbClr val="323232"/>
+                </a:solidFill>
+              </a:defRPr>
+            </a:pPr>
+            <a:r>
+              <a:t>TTS が応答を受け取れるように修正</a:t>
+            </a:r>
+          </a:p>
+          <a:p>
+            <a:pPr>
+              <a:spcBef>
+                <a:spcPts val="600"/>
+              </a:spcBef>
+              <a:spcAft>
+                <a:spcPts val="600"/>
+              </a:spcAft>
+              <a:defRPr sz="1800">
+                <a:solidFill>
+                  <a:srgbClr val="323232"/>
+                </a:solidFill>
+              </a:defRPr>
+            </a:pPr>
+          </a:p>
+          <a:p>
+            <a:pPr>
+              <a:spcBef>
+                <a:spcPts val="600"/>
+              </a:spcBef>
+              <a:spcAft>
+                <a:spcPts val="600"/>
+              </a:spcAft>
+              <a:defRPr sz="1800">
+                <a:solidFill>
+                  <a:srgbClr val="323232"/>
+                </a:solidFill>
+              </a:defRPr>
+            </a:pPr>
+            <a:r>
+              <a:t>3. Audio Connector 管理:</a:t>
+            </a:r>
+          </a:p>
+          <a:p>
+            <a:pPr lvl="1">
+              <a:spcBef>
+                <a:spcPts val="600"/>
+              </a:spcBef>
+              <a:spcAft>
+                <a:spcPts val="600"/>
+              </a:spcAft>
+              <a:defRPr sz="1600">
+                <a:solidFill>
+                  <a:srgbClr val="323232"/>
+                </a:solidFill>
+              </a:defRPr>
+            </a:pPr>
+            <a:r>
+              <a:t>新接続時に古い connector を全て停止</a:t>
+            </a:r>
+          </a:p>
+          <a:p>
+            <a:pPr lvl="1">
+              <a:spcBef>
+                <a:spcPts val="600"/>
+              </a:spcBef>
+              <a:spcAft>
+                <a:spcPts val="600"/>
+              </a:spcAft>
+              <a:defRPr sz="1600">
+                <a:solidFill>
+                  <a:srgbClr val="323232"/>
+                </a:solidFill>
+              </a:defRPr>
+            </a:pPr>
+            <a:r>
+              <a:t>メモリリークを防止</a:t>
             </a:r>
           </a:p>
         </p:txBody>
@@ -5743,7 +5402,7 @@
               </a:defRPr>
             </a:pPr>
             <a:r>
-              <a:t>トラブルシューティング</a:t>
+              <a:t>エラーハンドリング</a:t>
             </a:r>
           </a:p>
         </p:txBody>
@@ -5784,217 +5443,199 @@
               </a:defRPr>
             </a:pPr>
             <a:r>
-              <a:t>接続できない:</a:t>
-            </a:r>
-          </a:p>
-          <a:p>
-            <a:pPr lvl="1">
-              <a:spcBef>
-                <a:spcPts val="600"/>
-              </a:spcBef>
-              <a:spcAft>
-                <a:spcPts val="600"/>
-              </a:spcAft>
-              <a:defRPr sz="1600">
-                <a:solidFill>
-                  <a:srgbClr val="323232"/>
-                </a:solidFill>
-              </a:defRPr>
-            </a:pPr>
-            <a:r>
-              <a:t>LM Studio が起動しているか確認</a:t>
-            </a:r>
-          </a:p>
-          <a:p>
-            <a:pPr lvl="1">
-              <a:spcBef>
-                <a:spcPts val="600"/>
-              </a:spcBef>
-              <a:spcAft>
-                <a:spcPts val="600"/>
-              </a:spcAft>
-              <a:defRPr sz="1600">
-                <a:solidFill>
-                  <a:srgbClr val="323232"/>
-                </a:solidFill>
-              </a:defRPr>
-            </a:pPr>
-            <a:r>
-              <a:t>Tunnel URL が正しいか確認 (WS_URI)</a:t>
-            </a:r>
-          </a:p>
-          <a:p>
-            <a:pPr lvl="1">
-              <a:spcBef>
-                <a:spcPts val="600"/>
-              </a:spcBef>
-              <a:spcAft>
-                <a:spcPts val="600"/>
-              </a:spcAft>
-              <a:defRPr sz="1600">
-                <a:solidFill>
-                  <a:srgbClr val="323232"/>
-                </a:solidFill>
-              </a:defRPr>
-            </a:pPr>
-            <a:r>
-              <a:t>Vonage 認証情報が正しいか確認</a:t>
-            </a:r>
-          </a:p>
-          <a:p>
-            <a:pPr>
-              <a:spcBef>
-                <a:spcPts val="600"/>
-              </a:spcBef>
-              <a:spcAft>
-                <a:spcPts val="600"/>
-              </a:spcAft>
-              <a:defRPr sz="1800">
-                <a:solidFill>
-                  <a:srgbClr val="323232"/>
-                </a:solidFill>
-              </a:defRPr>
-            </a:pPr>
-          </a:p>
-          <a:p>
-            <a:pPr>
-              <a:spcBef>
-                <a:spcPts val="600"/>
-              </a:spcBef>
-              <a:spcAft>
-                <a:spcPts val="600"/>
-              </a:spcAft>
-              <a:defRPr sz="1800">
-                <a:solidFill>
-                  <a:srgbClr val="323232"/>
-                </a:solidFill>
-              </a:defRPr>
-            </a:pPr>
-            <a:r>
-              <a:t>音声が途切れる:</a:t>
-            </a:r>
-          </a:p>
-          <a:p>
-            <a:pPr lvl="1">
-              <a:spcBef>
-                <a:spcPts val="600"/>
-              </a:spcBef>
-              <a:spcAft>
-                <a:spcPts val="600"/>
-              </a:spcAft>
-              <a:defRPr sz="1600">
-                <a:solidFill>
-                  <a:srgbClr val="323232"/>
-                </a:solidFill>
-              </a:defRPr>
-            </a:pPr>
-            <a:r>
-              <a:t>ネットワーク遅延を確認</a:t>
-            </a:r>
-          </a:p>
-          <a:p>
-            <a:pPr lvl="1">
-              <a:spcBef>
-                <a:spcPts val="600"/>
-              </a:spcBef>
-              <a:spcAft>
-                <a:spcPts val="600"/>
-              </a:spcAft>
-              <a:defRPr sz="1600">
-                <a:solidFill>
-                  <a:srgbClr val="323232"/>
-                </a:solidFill>
-              </a:defRPr>
-            </a:pPr>
-            <a:r>
-              <a:t>LLM レスポンス時間が長すぎないか確認</a:t>
-            </a:r>
-          </a:p>
-          <a:p>
-            <a:pPr lvl="1">
-              <a:spcBef>
-                <a:spcPts val="600"/>
-              </a:spcBef>
-              <a:spcAft>
-                <a:spcPts val="600"/>
-              </a:spcAft>
-              <a:defRPr sz="1600">
-                <a:solidFill>
-                  <a:srgbClr val="323232"/>
-                </a:solidFill>
-              </a:defRPr>
-            </a:pPr>
-            <a:r>
-              <a:t>Whisper の no_speech_prob を調整</a:t>
-            </a:r>
-          </a:p>
-          <a:p>
-            <a:pPr>
-              <a:spcBef>
-                <a:spcPts val="600"/>
-              </a:spcBef>
-              <a:spcAft>
-                <a:spcPts val="600"/>
-              </a:spcAft>
-              <a:defRPr sz="1800">
-                <a:solidFill>
-                  <a:srgbClr val="323232"/>
-                </a:solidFill>
-              </a:defRPr>
-            </a:pPr>
-          </a:p>
-          <a:p>
-            <a:pPr>
-              <a:spcBef>
-                <a:spcPts val="600"/>
-              </a:spcBef>
-              <a:spcAft>
-                <a:spcPts val="600"/>
-              </a:spcAft>
-              <a:defRPr sz="1800">
-                <a:solidFill>
-                  <a:srgbClr val="323232"/>
-                </a:solidFill>
-              </a:defRPr>
-            </a:pPr>
-            <a:r>
-              <a:t>応答がない:</a:t>
-            </a:r>
-          </a:p>
-          <a:p>
-            <a:pPr lvl="1">
-              <a:spcBef>
-                <a:spcPts val="600"/>
-              </a:spcBef>
-              <a:spcAft>
-                <a:spcPts val="600"/>
-              </a:spcAft>
-              <a:defRPr sz="1600">
-                <a:solidFill>
-                  <a:srgbClr val="323232"/>
-                </a:solidFill>
-              </a:defRPr>
-            </a:pPr>
-            <a:r>
-              <a:t>LLM モデルが正しくロードされているか確認</a:t>
-            </a:r>
-          </a:p>
-          <a:p>
-            <a:pPr lvl="1">
-              <a:spcBef>
-                <a:spcPts val="600"/>
-              </a:spcBef>
-              <a:spcAft>
-                <a:spcPts val="600"/>
-              </a:spcAft>
-              <a:defRPr sz="1600">
-                <a:solidFill>
-                  <a:srgbClr val="323232"/>
-                </a:solidFill>
-              </a:defRPr>
-            </a:pPr>
-            <a:r>
-              <a:t>Monkey-Patch が適用されているか確認</a:t>
+              <a:t>サーバー側:</a:t>
+            </a:r>
+          </a:p>
+          <a:p>
+            <a:pPr lvl="1">
+              <a:spcBef>
+                <a:spcPts val="600"/>
+              </a:spcBef>
+              <a:spcAft>
+                <a:spcPts val="600"/>
+              </a:spcAft>
+              <a:defRPr sz="1600">
+                <a:solidFill>
+                  <a:srgbClr val="323232"/>
+                </a:solidFill>
+              </a:defRPr>
+            </a:pPr>
+            <a:r>
+              <a:t>WebSocket 切断 → finally で確実に cleanup</a:t>
+            </a:r>
+          </a:p>
+          <a:p>
+            <a:pPr lvl="1">
+              <a:spcBef>
+                <a:spcPts val="600"/>
+              </a:spcBef>
+              <a:spcAft>
+                <a:spcPts val="600"/>
+              </a:spcAft>
+              <a:defRPr sz="1600">
+                <a:solidFill>
+                  <a:srgbClr val="323232"/>
+                </a:solidFill>
+              </a:defRPr>
+            </a:pPr>
+            <a:r>
+              <a:t>モデル読み込み失敗 → ログして続行 (実行時エラー)</a:t>
+            </a:r>
+          </a:p>
+          <a:p>
+            <a:pPr lvl="1">
+              <a:spcBef>
+                <a:spcPts val="600"/>
+              </a:spcBef>
+              <a:spcAft>
+                <a:spcPts val="600"/>
+              </a:spcAft>
+              <a:defRPr sz="1600">
+                <a:solidFill>
+                  <a:srgbClr val="323232"/>
+                </a:solidFill>
+              </a:defRPr>
+            </a:pPr>
+            <a:r>
+              <a:t>Connector 停止失敗 → warning ログのみ</a:t>
+            </a:r>
+          </a:p>
+          <a:p>
+            <a:pPr>
+              <a:spcBef>
+                <a:spcPts val="600"/>
+              </a:spcBef>
+              <a:spcAft>
+                <a:spcPts val="600"/>
+              </a:spcAft>
+              <a:defRPr sz="1800">
+                <a:solidFill>
+                  <a:srgbClr val="323232"/>
+                </a:solidFill>
+              </a:defRPr>
+            </a:pPr>
+          </a:p>
+          <a:p>
+            <a:pPr>
+              <a:spcBef>
+                <a:spcPts val="600"/>
+              </a:spcBef>
+              <a:spcAft>
+                <a:spcPts val="600"/>
+              </a:spcAft>
+              <a:defRPr sz="1800">
+                <a:solidFill>
+                  <a:srgbClr val="323232"/>
+                </a:solidFill>
+              </a:defRPr>
+            </a:pPr>
+            <a:r>
+              <a:t>パイプライン側:</a:t>
+            </a:r>
+          </a:p>
+          <a:p>
+            <a:pPr lvl="1">
+              <a:spcBef>
+                <a:spcPts val="600"/>
+              </a:spcBef>
+              <a:spcAft>
+                <a:spcPts val="600"/>
+              </a:spcAft>
+              <a:defRPr sz="1600">
+                <a:solidFill>
+                  <a:srgbClr val="323232"/>
+                </a:solidFill>
+              </a:defRPr>
+            </a:pPr>
+            <a:r>
+              <a:t>STT タイムアウト → _ttfb_timeout_task を cancel</a:t>
+            </a:r>
+          </a:p>
+          <a:p>
+            <a:pPr lvl="1">
+              <a:spcBef>
+                <a:spcPts val="600"/>
+              </a:spcBef>
+              <a:spcAft>
+                <a:spcPts val="600"/>
+              </a:spcAft>
+              <a:defRPr sz="1600">
+                <a:solidFill>
+                  <a:srgbClr val="323232"/>
+                </a:solidFill>
+              </a:defRPr>
+            </a:pPr>
+            <a:r>
+              <a:t>LLM エラー → exception ログ → セッション終了</a:t>
+            </a:r>
+          </a:p>
+          <a:p>
+            <a:pPr>
+              <a:spcBef>
+                <a:spcPts val="600"/>
+              </a:spcBef>
+              <a:spcAft>
+                <a:spcPts val="600"/>
+              </a:spcAft>
+              <a:defRPr sz="1800">
+                <a:solidFill>
+                  <a:srgbClr val="323232"/>
+                </a:solidFill>
+              </a:defRPr>
+            </a:pPr>
+          </a:p>
+          <a:p>
+            <a:pPr>
+              <a:spcBef>
+                <a:spcPts val="600"/>
+              </a:spcBef>
+              <a:spcAft>
+                <a:spcPts val="600"/>
+              </a:spcAft>
+              <a:defRPr sz="1800">
+                <a:solidFill>
+                  <a:srgbClr val="323232"/>
+                </a:solidFill>
+              </a:defRPr>
+            </a:pPr>
+            <a:r>
+              <a:t>ブラウザ側:</a:t>
+            </a:r>
+          </a:p>
+          <a:p>
+            <a:pPr lvl="1">
+              <a:spcBef>
+                <a:spcPts val="600"/>
+              </a:spcBef>
+              <a:spcAft>
+                <a:spcPts val="600"/>
+              </a:spcAft>
+              <a:defRPr sz="1600">
+                <a:solidFill>
+                  <a:srgbClr val="323232"/>
+                </a:solidFill>
+              </a:defRPr>
+            </a:pPr>
+            <a:r>
+              <a:t>接続失敗 → UI に状態表示</a:t>
+            </a:r>
+          </a:p>
+          <a:p>
+            <a:pPr lvl="1">
+              <a:spcBef>
+                <a:spcPts val="600"/>
+              </a:spcBef>
+              <a:spcAft>
+                <a:spcPts val="600"/>
+              </a:spcAft>
+              <a:defRPr sz="1600">
+                <a:solidFill>
+                  <a:srgbClr val="323232"/>
+                </a:solidFill>
+              </a:defRPr>
+            </a:pPr>
+            <a:r>
+              <a:t>ストリーム受信失敗 → ログのみ (UI継続)</a:t>
             </a:r>
           </a:p>
         </p:txBody>
@@ -6301,6 +5942,903 @@
               </a:defRPr>
             </a:pPr>
             <a:r>
+              <a:t>パフォーマンス・最適化</a:t>
+            </a:r>
+          </a:p>
+        </p:txBody>
+      </p:sp>
+      <p:sp>
+        <p:nvSpPr>
+          <p:cNvPr id="3" name="TextBox 2"/>
+          <p:cNvSpPr txBox="1"/>
+          <p:nvPr/>
+        </p:nvSpPr>
+        <p:spPr>
+          <a:xfrm>
+            <a:off x="640080" y="1280160"/>
+            <a:ext cx="7863840" cy="5029200"/>
+          </a:xfrm>
+          <a:prstGeom prst="rect">
+            <a:avLst/>
+          </a:prstGeom>
+          <a:noFill/>
+        </p:spPr>
+        <p:txBody>
+          <a:bodyPr wrap="square">
+            <a:spAutoFit/>
+          </a:bodyPr>
+          <a:lstStyle/>
+          <a:p>
+            <a:pPr>
+              <a:spcBef>
+                <a:spcPts val="600"/>
+              </a:spcBef>
+              <a:spcAft>
+                <a:spcPts val="600"/>
+              </a:spcAft>
+              <a:defRPr sz="1800">
+                <a:solidFill>
+                  <a:srgbClr val="323232"/>
+                </a:solidFill>
+              </a:defRPr>
+            </a:pPr>
+            <a:r>
+              <a:t>モデル事前読み込み:</a:t>
+            </a:r>
+          </a:p>
+          <a:p>
+            <a:pPr lvl="1">
+              <a:spcBef>
+                <a:spcPts val="600"/>
+              </a:spcBef>
+              <a:spcAft>
+                <a:spcPts val="600"/>
+              </a:spcAft>
+              <a:defRPr sz="1600">
+                <a:solidFill>
+                  <a:srgbClr val="323232"/>
+                </a:solidFill>
+              </a:defRPr>
+            </a:pPr>
+            <a:r>
+              <a:t>サーバー起動時に preload_models() で全モデルをメモリ展開</a:t>
+            </a:r>
+          </a:p>
+          <a:p>
+            <a:pPr lvl="1">
+              <a:spcBef>
+                <a:spcPts val="600"/>
+              </a:spcBef>
+              <a:spcAft>
+                <a:spcPts val="600"/>
+              </a:spcAft>
+              <a:defRPr sz="1600">
+                <a:solidFill>
+                  <a:srgbClr val="323232"/>
+                </a:solidFill>
+              </a:defRPr>
+            </a:pPr>
+            <a:r>
+              <a:t>初回接続の遅延を排除</a:t>
+            </a:r>
+          </a:p>
+          <a:p>
+            <a:pPr>
+              <a:spcBef>
+                <a:spcPts val="600"/>
+              </a:spcBef>
+              <a:spcAft>
+                <a:spcPts val="600"/>
+              </a:spcAft>
+              <a:defRPr sz="1800">
+                <a:solidFill>
+                  <a:srgbClr val="323232"/>
+                </a:solidFill>
+              </a:defRPr>
+            </a:pPr>
+          </a:p>
+          <a:p>
+            <a:pPr>
+              <a:spcBef>
+                <a:spcPts val="600"/>
+              </a:spcBef>
+              <a:spcAft>
+                <a:spcPts val="600"/>
+              </a:spcAft>
+              <a:defRPr sz="1800">
+                <a:solidFill>
+                  <a:srgbClr val="323232"/>
+                </a:solidFill>
+              </a:defRPr>
+            </a:pPr>
+            <a:r>
+              <a:t>Whisper MLX:</a:t>
+            </a:r>
+          </a:p>
+          <a:p>
+            <a:pPr lvl="1">
+              <a:spcBef>
+                <a:spcPts val="600"/>
+              </a:spcBef>
+              <a:spcAft>
+                <a:spcPts val="600"/>
+              </a:spcAft>
+              <a:defRPr sz="1600">
+                <a:solidFill>
+                  <a:srgbClr val="323232"/>
+                </a:solidFill>
+              </a:defRPr>
+            </a:pPr>
+            <a:r>
+              <a:t>LARGE_V3_TURBO_Q4: 高速、高精度（Gemini 推奨）</a:t>
+            </a:r>
+          </a:p>
+          <a:p>
+            <a:pPr>
+              <a:spcBef>
+                <a:spcPts val="600"/>
+              </a:spcBef>
+              <a:spcAft>
+                <a:spcPts val="600"/>
+              </a:spcAft>
+              <a:defRPr sz="1800">
+                <a:solidFill>
+                  <a:srgbClr val="323232"/>
+                </a:solidFill>
+              </a:defRPr>
+            </a:pPr>
+          </a:p>
+          <a:p>
+            <a:pPr>
+              <a:spcBef>
+                <a:spcPts val="600"/>
+              </a:spcBef>
+              <a:spcAft>
+                <a:spcPts val="600"/>
+              </a:spcAft>
+              <a:defRPr sz="1800">
+                <a:solidFill>
+                  <a:srgbClr val="323232"/>
+                </a:solidFill>
+              </a:defRPr>
+            </a:pPr>
+            <a:r>
+              <a:t>非同期処理:</a:t>
+            </a:r>
+          </a:p>
+          <a:p>
+            <a:pPr lvl="1">
+              <a:spcBef>
+                <a:spcPts val="600"/>
+              </a:spcBef>
+              <a:spcAft>
+                <a:spcPts val="600"/>
+              </a:spcAft>
+              <a:defRPr sz="1600">
+                <a:solidFill>
+                  <a:srgbClr val="323232"/>
+                </a:solidFill>
+              </a:defRPr>
+            </a:pPr>
+            <a:r>
+              <a:t>asyncio で I/O ブロッキング回避</a:t>
+            </a:r>
+          </a:p>
+          <a:p>
+            <a:pPr lvl="1">
+              <a:spcBef>
+                <a:spcPts val="600"/>
+              </a:spcBef>
+              <a:spcAft>
+                <a:spcPts val="600"/>
+              </a:spcAft>
+              <a:defRPr sz="1600">
+                <a:solidFill>
+                  <a:srgbClr val="323232"/>
+                </a:solidFill>
+              </a:defRPr>
+            </a:pPr>
+            <a:r>
+              <a:t>並列処理で低遅延を実現</a:t>
+            </a:r>
+          </a:p>
+          <a:p>
+            <a:pPr>
+              <a:spcBef>
+                <a:spcPts val="600"/>
+              </a:spcBef>
+              <a:spcAft>
+                <a:spcPts val="600"/>
+              </a:spcAft>
+              <a:defRPr sz="1800">
+                <a:solidFill>
+                  <a:srgbClr val="323232"/>
+                </a:solidFill>
+              </a:defRPr>
+            </a:pPr>
+          </a:p>
+          <a:p>
+            <a:pPr>
+              <a:spcBef>
+                <a:spcPts val="600"/>
+              </a:spcBef>
+              <a:spcAft>
+                <a:spcPts val="600"/>
+              </a:spcAft>
+              <a:defRPr sz="1800">
+                <a:solidFill>
+                  <a:srgbClr val="323232"/>
+                </a:solidFill>
+              </a:defRPr>
+            </a:pPr>
+            <a:r>
+              <a:t>グリーティング戦略:</a:t>
+            </a:r>
+          </a:p>
+          <a:p>
+            <a:pPr lvl="1">
+              <a:spcBef>
+                <a:spcPts val="600"/>
+              </a:spcBef>
+              <a:spcAft>
+                <a:spcPts val="600"/>
+              </a:spcAft>
+              <a:defRPr sz="1600">
+                <a:solidFill>
+                  <a:srgbClr val="323232"/>
+                </a:solidFill>
+              </a:defRPr>
+            </a:pPr>
+            <a:r>
+              <a:t>即時 + 遅延の2つで ネットワーク遅延対応</a:t>
+            </a:r>
+          </a:p>
+        </p:txBody>
+      </p:sp>
+    </p:spTree>
+  </p:cSld>
+  <p:clrMapOvr>
+    <a:masterClrMapping/>
+  </p:clrMapOvr>
+</p:sld>
+</file>
+
+<file path=ppt/slides/slide21.xml><?xml version="1.0" encoding="utf-8"?>
+<p:sld xmlns:a="http://schemas.openxmlformats.org/drawingml/2006/main" xmlns:p="http://schemas.openxmlformats.org/presentationml/2006/main" xmlns:r="http://schemas.openxmlformats.org/officeDocument/2006/relationships">
+  <p:cSld>
+    <p:bg>
+      <p:bgPr>
+        <a:solidFill>
+          <a:srgbClr val="F5F5F5"/>
+        </a:solidFill>
+        <a:effectLst/>
+      </p:bgPr>
+    </p:bg>
+    <p:spTree>
+      <p:nvGrpSpPr>
+        <p:cNvPr id="1" name=""/>
+        <p:cNvGrpSpPr/>
+        <p:nvPr/>
+      </p:nvGrpSpPr>
+      <p:grpSpPr/>
+      <p:sp>
+        <p:nvSpPr>
+          <p:cNvPr id="2" name="TextBox 1"/>
+          <p:cNvSpPr txBox="1"/>
+          <p:nvPr/>
+        </p:nvSpPr>
+        <p:spPr>
+          <a:xfrm>
+            <a:off x="457200" y="365760"/>
+            <a:ext cx="8229600" cy="731520"/>
+          </a:xfrm>
+          <a:prstGeom prst="rect">
+            <a:avLst/>
+          </a:prstGeom>
+          <a:noFill/>
+        </p:spPr>
+        <p:txBody>
+          <a:bodyPr wrap="none">
+            <a:spAutoFit/>
+          </a:bodyPr>
+          <a:lstStyle/>
+          <a:p>
+            <a:pPr>
+              <a:defRPr sz="4000" b="1">
+                <a:solidFill>
+                  <a:srgbClr val="1976D2"/>
+                </a:solidFill>
+              </a:defRPr>
+            </a:pPr>
+            <a:r>
+              <a:t>セキュリティ考慮事項</a:t>
+            </a:r>
+          </a:p>
+        </p:txBody>
+      </p:sp>
+      <p:sp>
+        <p:nvSpPr>
+          <p:cNvPr id="3" name="TextBox 2"/>
+          <p:cNvSpPr txBox="1"/>
+          <p:nvPr/>
+        </p:nvSpPr>
+        <p:spPr>
+          <a:xfrm>
+            <a:off x="640080" y="1280160"/>
+            <a:ext cx="7863840" cy="5029200"/>
+          </a:xfrm>
+          <a:prstGeom prst="rect">
+            <a:avLst/>
+          </a:prstGeom>
+          <a:noFill/>
+        </p:spPr>
+        <p:txBody>
+          <a:bodyPr wrap="square">
+            <a:spAutoFit/>
+          </a:bodyPr>
+          <a:lstStyle/>
+          <a:p>
+            <a:pPr>
+              <a:spcBef>
+                <a:spcPts val="600"/>
+              </a:spcBef>
+              <a:spcAft>
+                <a:spcPts val="600"/>
+              </a:spcAft>
+              <a:defRPr sz="1800">
+                <a:solidFill>
+                  <a:srgbClr val="323232"/>
+                </a:solidFill>
+              </a:defRPr>
+            </a:pPr>
+            <a:r>
+              <a:t>プライバシー:</a:t>
+            </a:r>
+          </a:p>
+          <a:p>
+            <a:pPr lvl="1">
+              <a:spcBef>
+                <a:spcPts val="600"/>
+              </a:spcBef>
+              <a:spcAft>
+                <a:spcPts val="600"/>
+              </a:spcAft>
+              <a:defRPr sz="1600">
+                <a:solidFill>
+                  <a:srgbClr val="323232"/>
+                </a:solidFill>
+              </a:defRPr>
+            </a:pPr>
+            <a:r>
+              <a:t>全処理がローカルで実行 → データ外部送信なし</a:t>
+            </a:r>
+          </a:p>
+          <a:p>
+            <a:pPr lvl="1">
+              <a:spcBef>
+                <a:spcPts val="600"/>
+              </a:spcBef>
+              <a:spcAft>
+                <a:spcPts val="600"/>
+              </a:spcAft>
+              <a:defRPr sz="1600">
+                <a:solidFill>
+                  <a:srgbClr val="323232"/>
+                </a:solidFill>
+              </a:defRPr>
+            </a:pPr>
+            <a:r>
+              <a:t>LLM・STT・TTS は LM Studio で実行</a:t>
+            </a:r>
+          </a:p>
+          <a:p>
+            <a:pPr>
+              <a:spcBef>
+                <a:spcPts val="600"/>
+              </a:spcBef>
+              <a:spcAft>
+                <a:spcPts val="600"/>
+              </a:spcAft>
+              <a:defRPr sz="1800">
+                <a:solidFill>
+                  <a:srgbClr val="323232"/>
+                </a:solidFill>
+              </a:defRPr>
+            </a:pPr>
+          </a:p>
+          <a:p>
+            <a:pPr>
+              <a:spcBef>
+                <a:spcPts val="600"/>
+              </a:spcBef>
+              <a:spcAft>
+                <a:spcPts val="600"/>
+              </a:spcAft>
+              <a:defRPr sz="1800">
+                <a:solidFill>
+                  <a:srgbClr val="323232"/>
+                </a:solidFill>
+              </a:defRPr>
+            </a:pPr>
+            <a:r>
+              <a:t>認証・認可:</a:t>
+            </a:r>
+          </a:p>
+          <a:p>
+            <a:pPr lvl="1">
+              <a:spcBef>
+                <a:spcPts val="600"/>
+              </a:spcBef>
+              <a:spcAft>
+                <a:spcPts val="600"/>
+              </a:spcAft>
+              <a:defRPr sz="1600">
+                <a:solidFill>
+                  <a:srgbClr val="323232"/>
+                </a:solidFill>
+              </a:defRPr>
+            </a:pPr>
+            <a:r>
+              <a:t>Vonage API は SDK で認証 (private key 管理)</a:t>
+            </a:r>
+          </a:p>
+          <a:p>
+            <a:pPr lvl="1">
+              <a:spcBef>
+                <a:spcPts val="600"/>
+              </a:spcBef>
+              <a:spcAft>
+                <a:spcPts val="600"/>
+              </a:spcAft>
+              <a:defRPr sz="1600">
+                <a:solidFill>
+                  <a:srgbClr val="323232"/>
+                </a:solidFill>
+              </a:defRPr>
+            </a:pPr>
+            <a:r>
+              <a:t>環境変数で秘密情報を管理 (.env)</a:t>
+            </a:r>
+          </a:p>
+          <a:p>
+            <a:pPr>
+              <a:spcBef>
+                <a:spcPts val="600"/>
+              </a:spcBef>
+              <a:spcAft>
+                <a:spcPts val="600"/>
+              </a:spcAft>
+              <a:defRPr sz="1800">
+                <a:solidFill>
+                  <a:srgbClr val="323232"/>
+                </a:solidFill>
+              </a:defRPr>
+            </a:pPr>
+          </a:p>
+          <a:p>
+            <a:pPr>
+              <a:spcBef>
+                <a:spcPts val="600"/>
+              </a:spcBef>
+              <a:spcAft>
+                <a:spcPts val="600"/>
+              </a:spcAft>
+              <a:defRPr sz="1800">
+                <a:solidFill>
+                  <a:srgbClr val="323232"/>
+                </a:solidFill>
+              </a:defRPr>
+            </a:pPr>
+            <a:r>
+              <a:t>通信:</a:t>
+            </a:r>
+          </a:p>
+          <a:p>
+            <a:pPr lvl="1">
+              <a:spcBef>
+                <a:spcPts val="600"/>
+              </a:spcBef>
+              <a:spcAft>
+                <a:spcPts val="600"/>
+              </a:spcAft>
+              <a:defRPr sz="1600">
+                <a:solidFill>
+                  <a:srgbClr val="323232"/>
+                </a:solidFill>
+              </a:defRPr>
+            </a:pPr>
+            <a:r>
+              <a:t>Tunnel URL は HTTPS/WSS で暗号化</a:t>
+            </a:r>
+          </a:p>
+          <a:p>
+            <a:pPr lvl="1">
+              <a:spcBef>
+                <a:spcPts val="600"/>
+              </a:spcBef>
+              <a:spcAft>
+                <a:spcPts val="600"/>
+              </a:spcAft>
+              <a:defRPr sz="1600">
+                <a:solidFill>
+                  <a:srgbClr val="323232"/>
+                </a:solidFill>
+              </a:defRPr>
+            </a:pPr>
+            <a:r>
+              <a:t>WebSocket は binary protocol で効率的</a:t>
+            </a:r>
+          </a:p>
+        </p:txBody>
+      </p:sp>
+    </p:spTree>
+  </p:cSld>
+  <p:clrMapOvr>
+    <a:masterClrMapping/>
+  </p:clrMapOvr>
+</p:sld>
+</file>
+
+<file path=ppt/slides/slide22.xml><?xml version="1.0" encoding="utf-8"?>
+<p:sld xmlns:a="http://schemas.openxmlformats.org/drawingml/2006/main" xmlns:p="http://schemas.openxmlformats.org/presentationml/2006/main" xmlns:r="http://schemas.openxmlformats.org/officeDocument/2006/relationships">
+  <p:cSld>
+    <p:bg>
+      <p:bgPr>
+        <a:solidFill>
+          <a:srgbClr val="F5F5F5"/>
+        </a:solidFill>
+        <a:effectLst/>
+      </p:bgPr>
+    </p:bg>
+    <p:spTree>
+      <p:nvGrpSpPr>
+        <p:cNvPr id="1" name=""/>
+        <p:cNvGrpSpPr/>
+        <p:nvPr/>
+      </p:nvGrpSpPr>
+      <p:grpSpPr/>
+      <p:sp>
+        <p:nvSpPr>
+          <p:cNvPr id="2" name="TextBox 1"/>
+          <p:cNvSpPr txBox="1"/>
+          <p:nvPr/>
+        </p:nvSpPr>
+        <p:spPr>
+          <a:xfrm>
+            <a:off x="457200" y="365760"/>
+            <a:ext cx="8229600" cy="731520"/>
+          </a:xfrm>
+          <a:prstGeom prst="rect">
+            <a:avLst/>
+          </a:prstGeom>
+          <a:noFill/>
+        </p:spPr>
+        <p:txBody>
+          <a:bodyPr wrap="none">
+            <a:spAutoFit/>
+          </a:bodyPr>
+          <a:lstStyle/>
+          <a:p>
+            <a:pPr>
+              <a:defRPr sz="4000" b="1">
+                <a:solidFill>
+                  <a:srgbClr val="1976D2"/>
+                </a:solidFill>
+              </a:defRPr>
+            </a:pPr>
+            <a:r>
+              <a:t>トラブルシューティング</a:t>
+            </a:r>
+          </a:p>
+        </p:txBody>
+      </p:sp>
+      <p:sp>
+        <p:nvSpPr>
+          <p:cNvPr id="3" name="TextBox 2"/>
+          <p:cNvSpPr txBox="1"/>
+          <p:nvPr/>
+        </p:nvSpPr>
+        <p:spPr>
+          <a:xfrm>
+            <a:off x="640080" y="1280160"/>
+            <a:ext cx="7863840" cy="5029200"/>
+          </a:xfrm>
+          <a:prstGeom prst="rect">
+            <a:avLst/>
+          </a:prstGeom>
+          <a:noFill/>
+        </p:spPr>
+        <p:txBody>
+          <a:bodyPr wrap="square">
+            <a:spAutoFit/>
+          </a:bodyPr>
+          <a:lstStyle/>
+          <a:p>
+            <a:pPr>
+              <a:spcBef>
+                <a:spcPts val="600"/>
+              </a:spcBef>
+              <a:spcAft>
+                <a:spcPts val="600"/>
+              </a:spcAft>
+              <a:defRPr sz="1800">
+                <a:solidFill>
+                  <a:srgbClr val="323232"/>
+                </a:solidFill>
+              </a:defRPr>
+            </a:pPr>
+            <a:r>
+              <a:t>接続できない:</a:t>
+            </a:r>
+          </a:p>
+          <a:p>
+            <a:pPr lvl="1">
+              <a:spcBef>
+                <a:spcPts val="600"/>
+              </a:spcBef>
+              <a:spcAft>
+                <a:spcPts val="600"/>
+              </a:spcAft>
+              <a:defRPr sz="1600">
+                <a:solidFill>
+                  <a:srgbClr val="323232"/>
+                </a:solidFill>
+              </a:defRPr>
+            </a:pPr>
+            <a:r>
+              <a:t>LM Studio が起動しているか確認</a:t>
+            </a:r>
+          </a:p>
+          <a:p>
+            <a:pPr lvl="1">
+              <a:spcBef>
+                <a:spcPts val="600"/>
+              </a:spcBef>
+              <a:spcAft>
+                <a:spcPts val="600"/>
+              </a:spcAft>
+              <a:defRPr sz="1600">
+                <a:solidFill>
+                  <a:srgbClr val="323232"/>
+                </a:solidFill>
+              </a:defRPr>
+            </a:pPr>
+            <a:r>
+              <a:t>Tunnel URL が正しいか確認 (WS_URI)</a:t>
+            </a:r>
+          </a:p>
+          <a:p>
+            <a:pPr lvl="1">
+              <a:spcBef>
+                <a:spcPts val="600"/>
+              </a:spcBef>
+              <a:spcAft>
+                <a:spcPts val="600"/>
+              </a:spcAft>
+              <a:defRPr sz="1600">
+                <a:solidFill>
+                  <a:srgbClr val="323232"/>
+                </a:solidFill>
+              </a:defRPr>
+            </a:pPr>
+            <a:r>
+              <a:t>Vonage 認証情報が正しいか確認</a:t>
+            </a:r>
+          </a:p>
+          <a:p>
+            <a:pPr>
+              <a:spcBef>
+                <a:spcPts val="600"/>
+              </a:spcBef>
+              <a:spcAft>
+                <a:spcPts val="600"/>
+              </a:spcAft>
+              <a:defRPr sz="1800">
+                <a:solidFill>
+                  <a:srgbClr val="323232"/>
+                </a:solidFill>
+              </a:defRPr>
+            </a:pPr>
+          </a:p>
+          <a:p>
+            <a:pPr>
+              <a:spcBef>
+                <a:spcPts val="600"/>
+              </a:spcBef>
+              <a:spcAft>
+                <a:spcPts val="600"/>
+              </a:spcAft>
+              <a:defRPr sz="1800">
+                <a:solidFill>
+                  <a:srgbClr val="323232"/>
+                </a:solidFill>
+              </a:defRPr>
+            </a:pPr>
+            <a:r>
+              <a:t>音声が途切れる:</a:t>
+            </a:r>
+          </a:p>
+          <a:p>
+            <a:pPr lvl="1">
+              <a:spcBef>
+                <a:spcPts val="600"/>
+              </a:spcBef>
+              <a:spcAft>
+                <a:spcPts val="600"/>
+              </a:spcAft>
+              <a:defRPr sz="1600">
+                <a:solidFill>
+                  <a:srgbClr val="323232"/>
+                </a:solidFill>
+              </a:defRPr>
+            </a:pPr>
+            <a:r>
+              <a:t>ネットワーク遅延を確認</a:t>
+            </a:r>
+          </a:p>
+          <a:p>
+            <a:pPr lvl="1">
+              <a:spcBef>
+                <a:spcPts val="600"/>
+              </a:spcBef>
+              <a:spcAft>
+                <a:spcPts val="600"/>
+              </a:spcAft>
+              <a:defRPr sz="1600">
+                <a:solidFill>
+                  <a:srgbClr val="323232"/>
+                </a:solidFill>
+              </a:defRPr>
+            </a:pPr>
+            <a:r>
+              <a:t>LLM レスポンス時間が長すぎないか確認</a:t>
+            </a:r>
+          </a:p>
+          <a:p>
+            <a:pPr lvl="1">
+              <a:spcBef>
+                <a:spcPts val="600"/>
+              </a:spcBef>
+              <a:spcAft>
+                <a:spcPts val="600"/>
+              </a:spcAft>
+              <a:defRPr sz="1600">
+                <a:solidFill>
+                  <a:srgbClr val="323232"/>
+                </a:solidFill>
+              </a:defRPr>
+            </a:pPr>
+            <a:r>
+              <a:t>Whisper の no_speech_prob を調整</a:t>
+            </a:r>
+          </a:p>
+          <a:p>
+            <a:pPr>
+              <a:spcBef>
+                <a:spcPts val="600"/>
+              </a:spcBef>
+              <a:spcAft>
+                <a:spcPts val="600"/>
+              </a:spcAft>
+              <a:defRPr sz="1800">
+                <a:solidFill>
+                  <a:srgbClr val="323232"/>
+                </a:solidFill>
+              </a:defRPr>
+            </a:pPr>
+          </a:p>
+          <a:p>
+            <a:pPr>
+              <a:spcBef>
+                <a:spcPts val="600"/>
+              </a:spcBef>
+              <a:spcAft>
+                <a:spcPts val="600"/>
+              </a:spcAft>
+              <a:defRPr sz="1800">
+                <a:solidFill>
+                  <a:srgbClr val="323232"/>
+                </a:solidFill>
+              </a:defRPr>
+            </a:pPr>
+            <a:r>
+              <a:t>応答がない:</a:t>
+            </a:r>
+          </a:p>
+          <a:p>
+            <a:pPr lvl="1">
+              <a:spcBef>
+                <a:spcPts val="600"/>
+              </a:spcBef>
+              <a:spcAft>
+                <a:spcPts val="600"/>
+              </a:spcAft>
+              <a:defRPr sz="1600">
+                <a:solidFill>
+                  <a:srgbClr val="323232"/>
+                </a:solidFill>
+              </a:defRPr>
+            </a:pPr>
+            <a:r>
+              <a:t>LLM モデルが正しくロードされているか確認</a:t>
+            </a:r>
+          </a:p>
+          <a:p>
+            <a:pPr lvl="1">
+              <a:spcBef>
+                <a:spcPts val="600"/>
+              </a:spcBef>
+              <a:spcAft>
+                <a:spcPts val="600"/>
+              </a:spcAft>
+              <a:defRPr sz="1600">
+                <a:solidFill>
+                  <a:srgbClr val="323232"/>
+                </a:solidFill>
+              </a:defRPr>
+            </a:pPr>
+            <a:r>
+              <a:t>Monkey-Patch が適用されているか確認</a:t>
+            </a:r>
+          </a:p>
+        </p:txBody>
+      </p:sp>
+    </p:spTree>
+  </p:cSld>
+  <p:clrMapOvr>
+    <a:masterClrMapping/>
+  </p:clrMapOvr>
+</p:sld>
+</file>
+
+<file path=ppt/slides/slide23.xml><?xml version="1.0" encoding="utf-8"?>
+<p:sld xmlns:a="http://schemas.openxmlformats.org/drawingml/2006/main" xmlns:p="http://schemas.openxmlformats.org/presentationml/2006/main" xmlns:r="http://schemas.openxmlformats.org/officeDocument/2006/relationships">
+  <p:cSld>
+    <p:bg>
+      <p:bgPr>
+        <a:solidFill>
+          <a:srgbClr val="F5F5F5"/>
+        </a:solidFill>
+        <a:effectLst/>
+      </p:bgPr>
+    </p:bg>
+    <p:spTree>
+      <p:nvGrpSpPr>
+        <p:cNvPr id="1" name=""/>
+        <p:cNvGrpSpPr/>
+        <p:nvPr/>
+      </p:nvGrpSpPr>
+      <p:grpSpPr/>
+      <p:sp>
+        <p:nvSpPr>
+          <p:cNvPr id="2" name="TextBox 1"/>
+          <p:cNvSpPr txBox="1"/>
+          <p:nvPr/>
+        </p:nvSpPr>
+        <p:spPr>
+          <a:xfrm>
+            <a:off x="457200" y="365760"/>
+            <a:ext cx="8229600" cy="731520"/>
+          </a:xfrm>
+          <a:prstGeom prst="rect">
+            <a:avLst/>
+          </a:prstGeom>
+          <a:noFill/>
+        </p:spPr>
+        <p:txBody>
+          <a:bodyPr wrap="none">
+            <a:spAutoFit/>
+          </a:bodyPr>
+          <a:lstStyle/>
+          <a:p>
+            <a:pPr>
+              <a:defRPr sz="4000" b="1">
+                <a:solidFill>
+                  <a:srgbClr val="1976D2"/>
+                </a:solidFill>
+              </a:defRPr>
+            </a:pPr>
+            <a:r>
               <a:t>まとめ</a:t>
             </a:r>
           </a:p>
@@ -6799,7 +7337,7 @@
     <p:bg>
       <p:bgPr>
         <a:solidFill>
-          <a:srgbClr val="F5F5F5"/>
+          <a:srgbClr val="FFFFFF"/>
         </a:solidFill>
         <a:effectLst/>
       </p:bgPr>
@@ -6819,8 +7357,8 @@
         </p:nvSpPr>
         <p:spPr>
           <a:xfrm>
-            <a:off x="457200" y="365760"/>
-            <a:ext cx="8229600" cy="731520"/>
+            <a:off x="365760" y="228600"/>
+            <a:ext cx="8412480" cy="640080"/>
           </a:xfrm>
           <a:prstGeom prst="rect">
             <a:avLst/>
@@ -6828,221 +7366,48 @@
           <a:noFill/>
         </p:spPr>
         <p:txBody>
-          <a:bodyPr wrap="none">
+          <a:bodyPr wrap="square">
             <a:spAutoFit/>
           </a:bodyPr>
           <a:lstStyle/>
           <a:p>
-            <a:pPr>
-              <a:defRPr sz="4000" b="1">
+            <a:pPr algn="ctr">
+              <a:defRPr sz="2800" b="1">
                 <a:solidFill>
                   <a:srgbClr val="1976D2"/>
                 </a:solidFill>
               </a:defRPr>
             </a:pPr>
             <a:r>
-              <a:t>server.py: FastAPI サーバー</a:t>
-            </a:r>
-          </a:p>
-        </p:txBody>
-      </p:sp>
-      <p:sp>
-        <p:nvSpPr>
-          <p:cNvPr id="3" name="TextBox 2"/>
-          <p:cNvSpPr txBox="1"/>
+              <a:t>図解: システムアーキテクチャ全体構成</a:t>
+            </a:r>
+          </a:p>
+        </p:txBody>
+      </p:sp>
+      <p:pic>
+        <p:nvPicPr>
+          <p:cNvPr id="3" name="Picture 2" descr="system_architecture_jp.png"/>
+          <p:cNvPicPr>
+            <a:picLocks noChangeAspect="1"/>
+          </p:cNvPicPr>
           <p:nvPr/>
-        </p:nvSpPr>
+        </p:nvPicPr>
+        <p:blipFill>
+          <a:blip r:embed="rId2"/>
+          <a:stretch>
+            <a:fillRect/>
+          </a:stretch>
+        </p:blipFill>
         <p:spPr>
           <a:xfrm>
-            <a:off x="640080" y="1280160"/>
-            <a:ext cx="7863840" cy="5029200"/>
+            <a:off x="2525693" y="1051560"/>
+            <a:ext cx="4092614" cy="5486400"/>
           </a:xfrm>
           <a:prstGeom prst="rect">
             <a:avLst/>
           </a:prstGeom>
-          <a:noFill/>
         </p:spPr>
-        <p:txBody>
-          <a:bodyPr wrap="square">
-            <a:spAutoFit/>
-          </a:bodyPr>
-          <a:lstStyle/>
-          <a:p>
-            <a:pPr>
-              <a:spcBef>
-                <a:spcPts val="600"/>
-              </a:spcBef>
-              <a:spcAft>
-                <a:spcPts val="600"/>
-              </a:spcAft>
-              <a:defRPr sz="1800">
-                <a:solidFill>
-                  <a:srgbClr val="323232"/>
-                </a:solidFill>
-              </a:defRPr>
-            </a:pPr>
-            <a:r>
-              <a:t>責務: HTTP/WebSocket インターフェース、Vonage 統合</a:t>
-            </a:r>
-          </a:p>
-          <a:p>
-            <a:pPr>
-              <a:spcBef>
-                <a:spcPts val="600"/>
-              </a:spcBef>
-              <a:spcAft>
-                <a:spcPts val="600"/>
-              </a:spcAft>
-              <a:defRPr sz="1800">
-                <a:solidFill>
-                  <a:srgbClr val="323232"/>
-                </a:solidFill>
-              </a:defRPr>
-            </a:pPr>
-          </a:p>
-          <a:p>
-            <a:pPr>
-              <a:spcBef>
-                <a:spcPts val="600"/>
-              </a:spcBef>
-              <a:spcAft>
-                <a:spcPts val="600"/>
-              </a:spcAft>
-              <a:defRPr sz="1800">
-                <a:solidFill>
-                  <a:srgbClr val="323232"/>
-                </a:solidFill>
-              </a:defRPr>
-            </a:pPr>
-            <a:r>
-              <a:t>主要エンドポイント:</a:t>
-            </a:r>
-          </a:p>
-          <a:p>
-            <a:pPr lvl="1">
-              <a:spcBef>
-                <a:spcPts val="600"/>
-              </a:spcBef>
-              <a:spcAft>
-                <a:spcPts val="600"/>
-              </a:spcAft>
-              <a:defRPr sz="1600">
-                <a:solidFill>
-                  <a:srgbClr val="323232"/>
-                </a:solidFill>
-              </a:defRPr>
-            </a:pPr>
-            <a:r>
-              <a:t>GET/POST /voice/webhook: 電話着信受信 (NCCO返却)</a:t>
-            </a:r>
-          </a:p>
-          <a:p>
-            <a:pPr lvl="1">
-              <a:spcBef>
-                <a:spcPts val="600"/>
-              </a:spcBef>
-              <a:spcAft>
-                <a:spcPts val="600"/>
-              </a:spcAft>
-              <a:defRPr sz="1600">
-                <a:solidFill>
-                  <a:srgbClr val="323232"/>
-                </a:solidFill>
-              </a:defRPr>
-            </a:pPr>
-            <a:r>
-              <a:t>POST /demo/connect: ビデオセッション作成</a:t>
-            </a:r>
-          </a:p>
-          <a:p>
-            <a:pPr lvl="1">
-              <a:spcBef>
-                <a:spcPts val="600"/>
-              </a:spcBef>
-              <a:spcAft>
-                <a:spcPts val="600"/>
-              </a:spcAft>
-              <a:defRPr sz="1600">
-                <a:solidFill>
-                  <a:srgbClr val="323232"/>
-                </a:solidFill>
-              </a:defRPr>
-            </a:pPr>
-            <a:r>
-              <a:t>POST /connect: 一般接続 (Video API用)</a:t>
-            </a:r>
-          </a:p>
-          <a:p>
-            <a:pPr lvl="1">
-              <a:spcBef>
-                <a:spcPts val="600"/>
-              </a:spcBef>
-              <a:spcAft>
-                <a:spcPts val="600"/>
-              </a:spcAft>
-              <a:defRPr sz="1600">
-                <a:solidFill>
-                  <a:srgbClr val="323232"/>
-                </a:solidFill>
-              </a:defRPr>
-            </a:pPr>
-            <a:r>
-              <a:t>GET /: HTML 静的ファイル配信</a:t>
-            </a:r>
-          </a:p>
-          <a:p>
-            <a:pPr lvl="1">
-              <a:spcBef>
-                <a:spcPts val="600"/>
-              </a:spcBef>
-              <a:spcAft>
-                <a:spcPts val="600"/>
-              </a:spcAft>
-              <a:defRPr sz="1600">
-                <a:solidFill>
-                  <a:srgbClr val="323232"/>
-                </a:solidFill>
-              </a:defRPr>
-            </a:pPr>
-            <a:r>
-              <a:t>WebSocket /ws: 双方向音声ストリーミング</a:t>
-            </a:r>
-          </a:p>
-          <a:p>
-            <a:pPr>
-              <a:spcBef>
-                <a:spcPts val="600"/>
-              </a:spcBef>
-              <a:spcAft>
-                <a:spcPts val="600"/>
-              </a:spcAft>
-              <a:defRPr sz="1800">
-                <a:solidFill>
-                  <a:srgbClr val="323232"/>
-                </a:solidFill>
-              </a:defRPr>
-            </a:pPr>
-          </a:p>
-          <a:p>
-            <a:pPr>
-              <a:spcBef>
-                <a:spcPts val="600"/>
-              </a:spcBef>
-              <a:spcAft>
-                <a:spcPts val="600"/>
-              </a:spcAft>
-              <a:defRPr sz="1800">
-                <a:solidFill>
-                  <a:srgbClr val="323232"/>
-                </a:solidFill>
-              </a:defRPr>
-            </a:pPr>
-            <a:r>
-              <a:t>セッション管理: _active_connectors 辞書で複数接続を追跡</a:t>
-            </a:r>
-          </a:p>
-        </p:txBody>
-      </p:sp>
+      </p:pic>
     </p:spTree>
   </p:cSld>
   <p:clrMapOvr>
@@ -7099,7 +7464,7 @@
               </a:defRPr>
             </a:pPr>
             <a:r>
-              <a:t>bot.py: Pipecat パイプライン</a:t>
+              <a:t>server.py: FastAPI サーバー</a:t>
             </a:r>
           </a:p>
         </p:txBody>
@@ -7140,163 +7505,163 @@
               </a:defRPr>
             </a:pPr>
             <a:r>
-              <a:t>責務: 音声処理、STT/LLM/TTS 統合、会話管理</a:t>
-            </a:r>
-          </a:p>
-          <a:p>
-            <a:pPr>
-              <a:spcBef>
-                <a:spcPts val="600"/>
-              </a:spcBef>
-              <a:spcAft>
-                <a:spcPts val="600"/>
-              </a:spcAft>
-              <a:defRPr sz="1800">
-                <a:solidFill>
-                  <a:srgbClr val="323232"/>
-                </a:solidFill>
-              </a:defRPr>
-            </a:pPr>
-          </a:p>
-          <a:p>
-            <a:pPr>
-              <a:spcBef>
-                <a:spcPts val="600"/>
-              </a:spcBef>
-              <a:spcAft>
-                <a:spcPts val="600"/>
-              </a:spcAft>
-              <a:defRPr sz="1800">
-                <a:solidFill>
-                  <a:srgbClr val="323232"/>
-                </a:solidFill>
-              </a:defRPr>
-            </a:pPr>
-            <a:r>
-              <a:t>初期化 (preload_models):</a:t>
-            </a:r>
-          </a:p>
-          <a:p>
-            <a:pPr lvl="1">
-              <a:spcBef>
-                <a:spcPts val="600"/>
-              </a:spcBef>
-              <a:spcAft>
-                <a:spcPts val="600"/>
-              </a:spcAft>
-              <a:defRPr sz="1600">
-                <a:solidFill>
-                  <a:srgbClr val="323232"/>
-                </a:solidFill>
-              </a:defRPr>
-            </a:pPr>
-            <a:r>
-              <a:t>OpenAILLMService (LM Studio)</a:t>
-            </a:r>
-          </a:p>
-          <a:p>
-            <a:pPr lvl="1">
-              <a:spcBef>
-                <a:spcPts val="600"/>
-              </a:spcBef>
-              <a:spcAft>
-                <a:spcPts val="600"/>
-              </a:spcAft>
-              <a:defRPr sz="1600">
-                <a:solidFill>
-                  <a:srgbClr val="323232"/>
-                </a:solidFill>
-              </a:defRPr>
-            </a:pPr>
-            <a:r>
-              <a:t>WhisperSTTServiceMLX (Whisper)</a:t>
-            </a:r>
-          </a:p>
-          <a:p>
-            <a:pPr lvl="1">
-              <a:spcBef>
-                <a:spcPts val="600"/>
-              </a:spcBef>
-              <a:spcAft>
-                <a:spcPts val="600"/>
-              </a:spcAft>
-              <a:defRPr sz="1600">
-                <a:solidFill>
-                  <a:srgbClr val="323232"/>
-                </a:solidFill>
-              </a:defRPr>
-            </a:pPr>
-            <a:r>
-              <a:t>PiperPlusTTSService (日本語TTS)</a:t>
-            </a:r>
-          </a:p>
-          <a:p>
-            <a:pPr lvl="1">
-              <a:spcBef>
-                <a:spcPts val="600"/>
-              </a:spcBef>
-              <a:spcAft>
-                <a:spcPts val="600"/>
-              </a:spcAft>
-              <a:defRPr sz="1600">
-                <a:solidFill>
-                  <a:srgbClr val="323232"/>
-                </a:solidFill>
-              </a:defRPr>
-            </a:pPr>
-            <a:r>
-              <a:t>SileroVADAnalyzer (音声検出)</a:t>
-            </a:r>
-          </a:p>
-          <a:p>
-            <a:pPr lvl="1">
-              <a:spcBef>
-                <a:spcPts val="600"/>
-              </a:spcBef>
-              <a:spcAft>
-                <a:spcPts val="600"/>
-              </a:spcAft>
-              <a:defRPr sz="1600">
-                <a:solidFill>
-                  <a:srgbClr val="323232"/>
-                </a:solidFill>
-              </a:defRPr>
-            </a:pPr>
-            <a:r>
-              <a:t>LocalSmartTurnAnalyzerV3 (会話ターン検出)</a:t>
-            </a:r>
-          </a:p>
-          <a:p>
-            <a:pPr>
-              <a:spcBef>
-                <a:spcPts val="600"/>
-              </a:spcBef>
-              <a:spcAft>
-                <a:spcPts val="600"/>
-              </a:spcAft>
-              <a:defRPr sz="1800">
-                <a:solidFill>
-                  <a:srgbClr val="323232"/>
-                </a:solidFill>
-              </a:defRPr>
-            </a:pPr>
-          </a:p>
-          <a:p>
-            <a:pPr>
-              <a:spcBef>
-                <a:spcPts val="600"/>
-              </a:spcBef>
-              <a:spcAft>
-                <a:spcPts val="600"/>
-              </a:spcAft>
-              <a:defRPr sz="1800">
-                <a:solidFill>
-                  <a:srgbClr val="323232"/>
-                </a:solidFill>
-              </a:defRPr>
-            </a:pPr>
-            <a:r>
-              <a:t>重要な修正: LLMAssistantAggregator の TextFrame を下流に転送する Monkey-Patch</a:t>
+              <a:t>責務: HTTP/WebSocket インターフェース、Vonage 統合</a:t>
+            </a:r>
+          </a:p>
+          <a:p>
+            <a:pPr>
+              <a:spcBef>
+                <a:spcPts val="600"/>
+              </a:spcBef>
+              <a:spcAft>
+                <a:spcPts val="600"/>
+              </a:spcAft>
+              <a:defRPr sz="1800">
+                <a:solidFill>
+                  <a:srgbClr val="323232"/>
+                </a:solidFill>
+              </a:defRPr>
+            </a:pPr>
+          </a:p>
+          <a:p>
+            <a:pPr>
+              <a:spcBef>
+                <a:spcPts val="600"/>
+              </a:spcBef>
+              <a:spcAft>
+                <a:spcPts val="600"/>
+              </a:spcAft>
+              <a:defRPr sz="1800">
+                <a:solidFill>
+                  <a:srgbClr val="323232"/>
+                </a:solidFill>
+              </a:defRPr>
+            </a:pPr>
+            <a:r>
+              <a:t>主要エンドポイント:</a:t>
+            </a:r>
+          </a:p>
+          <a:p>
+            <a:pPr lvl="1">
+              <a:spcBef>
+                <a:spcPts val="600"/>
+              </a:spcBef>
+              <a:spcAft>
+                <a:spcPts val="600"/>
+              </a:spcAft>
+              <a:defRPr sz="1600">
+                <a:solidFill>
+                  <a:srgbClr val="323232"/>
+                </a:solidFill>
+              </a:defRPr>
+            </a:pPr>
+            <a:r>
+              <a:t>GET/POST /voice/webhook: 電話着信受信 (NCCO返却)</a:t>
+            </a:r>
+          </a:p>
+          <a:p>
+            <a:pPr lvl="1">
+              <a:spcBef>
+                <a:spcPts val="600"/>
+              </a:spcBef>
+              <a:spcAft>
+                <a:spcPts val="600"/>
+              </a:spcAft>
+              <a:defRPr sz="1600">
+                <a:solidFill>
+                  <a:srgbClr val="323232"/>
+                </a:solidFill>
+              </a:defRPr>
+            </a:pPr>
+            <a:r>
+              <a:t>POST /demo/connect: ビデオセッション作成</a:t>
+            </a:r>
+          </a:p>
+          <a:p>
+            <a:pPr lvl="1">
+              <a:spcBef>
+                <a:spcPts val="600"/>
+              </a:spcBef>
+              <a:spcAft>
+                <a:spcPts val="600"/>
+              </a:spcAft>
+              <a:defRPr sz="1600">
+                <a:solidFill>
+                  <a:srgbClr val="323232"/>
+                </a:solidFill>
+              </a:defRPr>
+            </a:pPr>
+            <a:r>
+              <a:t>POST /connect: 一般接続 (Video API用)</a:t>
+            </a:r>
+          </a:p>
+          <a:p>
+            <a:pPr lvl="1">
+              <a:spcBef>
+                <a:spcPts val="600"/>
+              </a:spcBef>
+              <a:spcAft>
+                <a:spcPts val="600"/>
+              </a:spcAft>
+              <a:defRPr sz="1600">
+                <a:solidFill>
+                  <a:srgbClr val="323232"/>
+                </a:solidFill>
+              </a:defRPr>
+            </a:pPr>
+            <a:r>
+              <a:t>GET /: HTML 静的ファイル配信</a:t>
+            </a:r>
+          </a:p>
+          <a:p>
+            <a:pPr lvl="1">
+              <a:spcBef>
+                <a:spcPts val="600"/>
+              </a:spcBef>
+              <a:spcAft>
+                <a:spcPts val="600"/>
+              </a:spcAft>
+              <a:defRPr sz="1600">
+                <a:solidFill>
+                  <a:srgbClr val="323232"/>
+                </a:solidFill>
+              </a:defRPr>
+            </a:pPr>
+            <a:r>
+              <a:t>WebSocket /ws: 双方向音声ストリーミング</a:t>
+            </a:r>
+          </a:p>
+          <a:p>
+            <a:pPr>
+              <a:spcBef>
+                <a:spcPts val="600"/>
+              </a:spcBef>
+              <a:spcAft>
+                <a:spcPts val="600"/>
+              </a:spcAft>
+              <a:defRPr sz="1800">
+                <a:solidFill>
+                  <a:srgbClr val="323232"/>
+                </a:solidFill>
+              </a:defRPr>
+            </a:pPr>
+          </a:p>
+          <a:p>
+            <a:pPr>
+              <a:spcBef>
+                <a:spcPts val="600"/>
+              </a:spcBef>
+              <a:spcAft>
+                <a:spcPts val="600"/>
+              </a:spcAft>
+              <a:defRPr sz="1800">
+                <a:solidFill>
+                  <a:srgbClr val="323232"/>
+                </a:solidFill>
+              </a:defRPr>
+            </a:pPr>
+            <a:r>
+              <a:t>セッション管理: _active_connectors 辞書で複数接続を追跡</a:t>
             </a:r>
           </a:p>
         </p:txBody>
@@ -7357,7 +7722,7 @@
               </a:defRPr>
             </a:pPr>
             <a:r>
-              <a:t>Pipecat パイプラインフロー</a:t>
+              <a:t>bot.py: Pipecat パイプライン</a:t>
             </a:r>
           </a:p>
         </p:txBody>
@@ -7398,133 +7763,163 @@
               </a:defRPr>
             </a:pPr>
             <a:r>
-              <a:t>1. Transport Input → AudioFrameLogger (デバッグ)</a:t>
-            </a:r>
-          </a:p>
-          <a:p>
-            <a:pPr>
-              <a:spcBef>
-                <a:spcPts val="600"/>
-              </a:spcBef>
-              <a:spcAft>
-                <a:spcPts val="600"/>
-              </a:spcAft>
-              <a:defRPr sz="1800">
-                <a:solidFill>
-                  <a:srgbClr val="323232"/>
-                </a:solidFill>
-              </a:defRPr>
-            </a:pPr>
-            <a:r>
-              <a:t>2. VADProcessor (SileroVAD) → 音声/無音検出</a:t>
-            </a:r>
-          </a:p>
-          <a:p>
-            <a:pPr>
-              <a:spcBef>
-                <a:spcPts val="600"/>
-              </a:spcBef>
-              <a:spcAft>
-                <a:spcPts val="600"/>
-              </a:spcAft>
-              <a:defRPr sz="1800">
-                <a:solidFill>
-                  <a:srgbClr val="323232"/>
-                </a:solidFill>
-              </a:defRPr>
-            </a:pPr>
-            <a:r>
-              <a:t>3. WhisperSTTServiceMLX → 音声 → テキスト</a:t>
-            </a:r>
-          </a:p>
-          <a:p>
-            <a:pPr>
-              <a:spcBef>
-                <a:spcPts val="600"/>
-              </a:spcBef>
-              <a:spcAft>
-                <a:spcPts val="600"/>
-              </a:spcAft>
-              <a:defRPr sz="1800">
-                <a:solidFill>
-                  <a:srgbClr val="323232"/>
-                </a:solidFill>
-              </a:defRPr>
-            </a:pPr>
-            <a:r>
-              <a:t>4. LLMUserAggregator → 発話を LLMContext に追加</a:t>
-            </a:r>
-          </a:p>
-          <a:p>
-            <a:pPr>
-              <a:spcBef>
-                <a:spcPts val="600"/>
-              </a:spcBef>
-              <a:spcAft>
-                <a:spcPts val="600"/>
-              </a:spcAft>
-              <a:defRPr sz="1800">
-                <a:solidFill>
-                  <a:srgbClr val="323232"/>
-                </a:solidFill>
-              </a:defRPr>
-            </a:pPr>
-            <a:r>
-              <a:t>5. OpenAILLMService (LM Studio) → テキスト → テキスト</a:t>
-            </a:r>
-          </a:p>
-          <a:p>
-            <a:pPr>
-              <a:spcBef>
-                <a:spcPts val="600"/>
-              </a:spcBef>
-              <a:spcAft>
-                <a:spcPts val="600"/>
-              </a:spcAft>
-              <a:defRPr sz="1800">
-                <a:solidFill>
-                  <a:srgbClr val="323232"/>
-                </a:solidFill>
-              </a:defRPr>
-            </a:pPr>
-            <a:r>
-              <a:t>6. LLMAssistantAggregator → 応答を LLMContext + TTS に送信</a:t>
-            </a:r>
-          </a:p>
-          <a:p>
-            <a:pPr>
-              <a:spcBef>
-                <a:spcPts val="600"/>
-              </a:spcBef>
-              <a:spcAft>
-                <a:spcPts val="600"/>
-              </a:spcAft>
-              <a:defRPr sz="1800">
-                <a:solidFill>
-                  <a:srgbClr val="323232"/>
-                </a:solidFill>
-              </a:defRPr>
-            </a:pPr>
-            <a:r>
-              <a:t>7. PiperPlusTTSService → テキスト → 音声フレーム</a:t>
-            </a:r>
-          </a:p>
-          <a:p>
-            <a:pPr>
-              <a:spcBef>
-                <a:spcPts val="600"/>
-              </a:spcBef>
-              <a:spcAft>
-                <a:spcPts val="600"/>
-              </a:spcAft>
-              <a:defRPr sz="1800">
-                <a:solidFill>
-                  <a:srgbClr val="323232"/>
-                </a:solidFill>
-              </a:defRPr>
-            </a:pPr>
-            <a:r>
-              <a:t>8. Transport Output → クライアントに送信</a:t>
+              <a:t>責務: 音声処理、STT/LLM/TTS 統合、会話管理</a:t>
+            </a:r>
+          </a:p>
+          <a:p>
+            <a:pPr>
+              <a:spcBef>
+                <a:spcPts val="600"/>
+              </a:spcBef>
+              <a:spcAft>
+                <a:spcPts val="600"/>
+              </a:spcAft>
+              <a:defRPr sz="1800">
+                <a:solidFill>
+                  <a:srgbClr val="323232"/>
+                </a:solidFill>
+              </a:defRPr>
+            </a:pPr>
+          </a:p>
+          <a:p>
+            <a:pPr>
+              <a:spcBef>
+                <a:spcPts val="600"/>
+              </a:spcBef>
+              <a:spcAft>
+                <a:spcPts val="600"/>
+              </a:spcAft>
+              <a:defRPr sz="1800">
+                <a:solidFill>
+                  <a:srgbClr val="323232"/>
+                </a:solidFill>
+              </a:defRPr>
+            </a:pPr>
+            <a:r>
+              <a:t>初期化 (preload_models):</a:t>
+            </a:r>
+          </a:p>
+          <a:p>
+            <a:pPr lvl="1">
+              <a:spcBef>
+                <a:spcPts val="600"/>
+              </a:spcBef>
+              <a:spcAft>
+                <a:spcPts val="600"/>
+              </a:spcAft>
+              <a:defRPr sz="1600">
+                <a:solidFill>
+                  <a:srgbClr val="323232"/>
+                </a:solidFill>
+              </a:defRPr>
+            </a:pPr>
+            <a:r>
+              <a:t>OpenAILLMService (LM Studio)</a:t>
+            </a:r>
+          </a:p>
+          <a:p>
+            <a:pPr lvl="1">
+              <a:spcBef>
+                <a:spcPts val="600"/>
+              </a:spcBef>
+              <a:spcAft>
+                <a:spcPts val="600"/>
+              </a:spcAft>
+              <a:defRPr sz="1600">
+                <a:solidFill>
+                  <a:srgbClr val="323232"/>
+                </a:solidFill>
+              </a:defRPr>
+            </a:pPr>
+            <a:r>
+              <a:t>WhisperSTTServiceMLX (Whisper)</a:t>
+            </a:r>
+          </a:p>
+          <a:p>
+            <a:pPr lvl="1">
+              <a:spcBef>
+                <a:spcPts val="600"/>
+              </a:spcBef>
+              <a:spcAft>
+                <a:spcPts val="600"/>
+              </a:spcAft>
+              <a:defRPr sz="1600">
+                <a:solidFill>
+                  <a:srgbClr val="323232"/>
+                </a:solidFill>
+              </a:defRPr>
+            </a:pPr>
+            <a:r>
+              <a:t>PiperPlusTTSService (日本語TTS)</a:t>
+            </a:r>
+          </a:p>
+          <a:p>
+            <a:pPr lvl="1">
+              <a:spcBef>
+                <a:spcPts val="600"/>
+              </a:spcBef>
+              <a:spcAft>
+                <a:spcPts val="600"/>
+              </a:spcAft>
+              <a:defRPr sz="1600">
+                <a:solidFill>
+                  <a:srgbClr val="323232"/>
+                </a:solidFill>
+              </a:defRPr>
+            </a:pPr>
+            <a:r>
+              <a:t>SileroVADAnalyzer (音声検出)</a:t>
+            </a:r>
+          </a:p>
+          <a:p>
+            <a:pPr lvl="1">
+              <a:spcBef>
+                <a:spcPts val="600"/>
+              </a:spcBef>
+              <a:spcAft>
+                <a:spcPts val="600"/>
+              </a:spcAft>
+              <a:defRPr sz="1600">
+                <a:solidFill>
+                  <a:srgbClr val="323232"/>
+                </a:solidFill>
+              </a:defRPr>
+            </a:pPr>
+            <a:r>
+              <a:t>LocalSmartTurnAnalyzerV3 (会話ターン検出)</a:t>
+            </a:r>
+          </a:p>
+          <a:p>
+            <a:pPr>
+              <a:spcBef>
+                <a:spcPts val="600"/>
+              </a:spcBef>
+              <a:spcAft>
+                <a:spcPts val="600"/>
+              </a:spcAft>
+              <a:defRPr sz="1800">
+                <a:solidFill>
+                  <a:srgbClr val="323232"/>
+                </a:solidFill>
+              </a:defRPr>
+            </a:pPr>
+          </a:p>
+          <a:p>
+            <a:pPr>
+              <a:spcBef>
+                <a:spcPts val="600"/>
+              </a:spcBef>
+              <a:spcAft>
+                <a:spcPts val="600"/>
+              </a:spcAft>
+              <a:defRPr sz="1800">
+                <a:solidFill>
+                  <a:srgbClr val="323232"/>
+                </a:solidFill>
+              </a:defRPr>
+            </a:pPr>
+            <a:r>
+              <a:t>重要な修正: LLMAssistantAggregator の TextFrame を下流に転送する Monkey-Patch</a:t>
             </a:r>
           </a:p>
         </p:txBody>
@@ -7585,7 +7980,7 @@
               </a:defRPr>
             </a:pPr>
             <a:r>
-              <a:t>tts_piper_plus.py: 日本語 TTS</a:t>
+              <a:t>Pipecat パイプラインフロー</a:t>
             </a:r>
           </a:p>
         </p:txBody>
@@ -7626,145 +8021,133 @@
               </a:defRPr>
             </a:pPr>
             <a:r>
-              <a:t>目的: pyopenjtalk（日本語HTS音声合成）を Pipecat インターフェースでラップ</a:t>
-            </a:r>
-          </a:p>
-          <a:p>
-            <a:pPr>
-              <a:spcBef>
-                <a:spcPts val="600"/>
-              </a:spcBef>
-              <a:spcAft>
-                <a:spcPts val="600"/>
-              </a:spcAft>
-              <a:defRPr sz="1800">
-                <a:solidFill>
-                  <a:srgbClr val="323232"/>
-                </a:solidFill>
-              </a:defRPr>
-            </a:pPr>
-          </a:p>
-          <a:p>
-            <a:pPr>
-              <a:spcBef>
-                <a:spcPts val="600"/>
-              </a:spcBef>
-              <a:spcAft>
-                <a:spcPts val="600"/>
-              </a:spcAft>
-              <a:defRPr sz="1800">
-                <a:solidFill>
-                  <a:srgbClr val="323232"/>
-                </a:solidFill>
-              </a:defRPr>
-            </a:pPr>
-            <a:r>
-              <a:t>機能:</a:t>
-            </a:r>
-          </a:p>
-          <a:p>
-            <a:pPr lvl="1">
-              <a:spcBef>
-                <a:spcPts val="600"/>
-              </a:spcBef>
-              <a:spcAft>
-                <a:spcPts val="600"/>
-              </a:spcAft>
-              <a:defRPr sz="1600">
-                <a:solidFill>
-                  <a:srgbClr val="323232"/>
-                </a:solidFill>
-              </a:defRPr>
-            </a:pPr>
-            <a:r>
-              <a:t>非同期実行: スレッドプールで TTS 処理をブロッキング回避</a:t>
-            </a:r>
-          </a:p>
-          <a:p>
-            <a:pPr lvl="1">
-              <a:spcBef>
-                <a:spcPts val="600"/>
-              </a:spcBef>
-              <a:spcAft>
-                <a:spcPts val="600"/>
-              </a:spcAft>
-              <a:defRPr sz="1600">
-                <a:solidFill>
-                  <a:srgbClr val="323232"/>
-                </a:solidFill>
-              </a:defRPr>
-            </a:pPr>
-            <a:r>
-              <a:t>音声正規化: float64 → int16 に変換・クリップ</a:t>
-            </a:r>
-          </a:p>
-          <a:p>
-            <a:pPr lvl="1">
-              <a:spcBef>
-                <a:spcPts val="600"/>
-              </a:spcBef>
-              <a:spcAft>
-                <a:spcPts val="600"/>
-              </a:spcAft>
-              <a:defRPr sz="1600">
-                <a:solidFill>
-                  <a:srgbClr val="323232"/>
-                </a:solidFill>
-              </a:defRPr>
-            </a:pPr>
-            <a:r>
-              <a:t>チャンク化: 4096B 単位で TTSAudioRawFrame を生成</a:t>
-            </a:r>
-          </a:p>
-          <a:p>
-            <a:pPr lvl="1">
-              <a:spcBef>
-                <a:spcPts val="600"/>
-              </a:spcBef>
-              <a:spcAft>
-                <a:spcPts val="600"/>
-              </a:spcAft>
-              <a:defRPr sz="1600">
-                <a:solidFill>
-                  <a:srgbClr val="323232"/>
-                </a:solidFill>
-              </a:defRPr>
-            </a:pPr>
-            <a:r>
-              <a:t>パラメータ: 速度=1.0、ピッチ=0.0（調整可能）</a:t>
-            </a:r>
-          </a:p>
-          <a:p>
-            <a:pPr>
-              <a:spcBef>
-                <a:spcPts val="600"/>
-              </a:spcBef>
-              <a:spcAft>
-                <a:spcPts val="600"/>
-              </a:spcAft>
-              <a:defRPr sz="1800">
-                <a:solidFill>
-                  <a:srgbClr val="323232"/>
-                </a:solidFill>
-              </a:defRPr>
-            </a:pPr>
-          </a:p>
-          <a:p>
-            <a:pPr>
-              <a:spcBef>
-                <a:spcPts val="600"/>
-              </a:spcBef>
-              <a:spcAft>
-                <a:spcPts val="600"/>
-              </a:spcAft>
-              <a:defRPr sz="1800">
-                <a:solidFill>
-                  <a:srgbClr val="323232"/>
-                </a:solidFill>
-              </a:defRPr>
-            </a:pPr>
-            <a:r>
-              <a:t>利点: モデルダウンロード不要、軽量、高速</a:t>
+              <a:t>1. Transport Input → AudioFrameLogger (デバッグ)</a:t>
+            </a:r>
+          </a:p>
+          <a:p>
+            <a:pPr>
+              <a:spcBef>
+                <a:spcPts val="600"/>
+              </a:spcBef>
+              <a:spcAft>
+                <a:spcPts val="600"/>
+              </a:spcAft>
+              <a:defRPr sz="1800">
+                <a:solidFill>
+                  <a:srgbClr val="323232"/>
+                </a:solidFill>
+              </a:defRPr>
+            </a:pPr>
+            <a:r>
+              <a:t>2. VADProcessor (SileroVAD) → 音声/無音検出</a:t>
+            </a:r>
+          </a:p>
+          <a:p>
+            <a:pPr>
+              <a:spcBef>
+                <a:spcPts val="600"/>
+              </a:spcBef>
+              <a:spcAft>
+                <a:spcPts val="600"/>
+              </a:spcAft>
+              <a:defRPr sz="1800">
+                <a:solidFill>
+                  <a:srgbClr val="323232"/>
+                </a:solidFill>
+              </a:defRPr>
+            </a:pPr>
+            <a:r>
+              <a:t>3. WhisperSTTServiceMLX → 音声 → テキスト</a:t>
+            </a:r>
+          </a:p>
+          <a:p>
+            <a:pPr>
+              <a:spcBef>
+                <a:spcPts val="600"/>
+              </a:spcBef>
+              <a:spcAft>
+                <a:spcPts val="600"/>
+              </a:spcAft>
+              <a:defRPr sz="1800">
+                <a:solidFill>
+                  <a:srgbClr val="323232"/>
+                </a:solidFill>
+              </a:defRPr>
+            </a:pPr>
+            <a:r>
+              <a:t>4. LLMUserAggregator → 発話を LLMContext に追加</a:t>
+            </a:r>
+          </a:p>
+          <a:p>
+            <a:pPr>
+              <a:spcBef>
+                <a:spcPts val="600"/>
+              </a:spcBef>
+              <a:spcAft>
+                <a:spcPts val="600"/>
+              </a:spcAft>
+              <a:defRPr sz="1800">
+                <a:solidFill>
+                  <a:srgbClr val="323232"/>
+                </a:solidFill>
+              </a:defRPr>
+            </a:pPr>
+            <a:r>
+              <a:t>5. OpenAILLMService (LM Studio) → テキスト → テキスト</a:t>
+            </a:r>
+          </a:p>
+          <a:p>
+            <a:pPr>
+              <a:spcBef>
+                <a:spcPts val="600"/>
+              </a:spcBef>
+              <a:spcAft>
+                <a:spcPts val="600"/>
+              </a:spcAft>
+              <a:defRPr sz="1800">
+                <a:solidFill>
+                  <a:srgbClr val="323232"/>
+                </a:solidFill>
+              </a:defRPr>
+            </a:pPr>
+            <a:r>
+              <a:t>6. LLMAssistantAggregator → 応答を LLMContext + TTS に送信</a:t>
+            </a:r>
+          </a:p>
+          <a:p>
+            <a:pPr>
+              <a:spcBef>
+                <a:spcPts val="600"/>
+              </a:spcBef>
+              <a:spcAft>
+                <a:spcPts val="600"/>
+              </a:spcAft>
+              <a:defRPr sz="1800">
+                <a:solidFill>
+                  <a:srgbClr val="323232"/>
+                </a:solidFill>
+              </a:defRPr>
+            </a:pPr>
+            <a:r>
+              <a:t>7. PiperPlusTTSService → テキスト → 音声フレーム</a:t>
+            </a:r>
+          </a:p>
+          <a:p>
+            <a:pPr>
+              <a:spcBef>
+                <a:spcPts val="600"/>
+              </a:spcBef>
+              <a:spcAft>
+                <a:spcPts val="600"/>
+              </a:spcAft>
+              <a:defRPr sz="1800">
+                <a:solidFill>
+                  <a:srgbClr val="323232"/>
+                </a:solidFill>
+              </a:defRPr>
+            </a:pPr>
+            <a:r>
+              <a:t>8. Transport Output → クライアントに送信</a:t>
             </a:r>
           </a:p>
         </p:txBody>
@@ -7783,7 +8166,7 @@
     <p:bg>
       <p:bgPr>
         <a:solidFill>
-          <a:srgbClr val="F5F5F5"/>
+          <a:srgbClr val="FFFFFF"/>
         </a:solidFill>
         <a:effectLst/>
       </p:bgPr>
@@ -7803,8 +8186,8 @@
         </p:nvSpPr>
         <p:spPr>
           <a:xfrm>
-            <a:off x="457200" y="365760"/>
-            <a:ext cx="8229600" cy="731520"/>
+            <a:off x="365760" y="228600"/>
+            <a:ext cx="8412480" cy="640080"/>
           </a:xfrm>
           <a:prstGeom prst="rect">
             <a:avLst/>
@@ -7812,203 +8195,48 @@
           <a:noFill/>
         </p:spPr>
         <p:txBody>
-          <a:bodyPr wrap="none">
+          <a:bodyPr wrap="square">
             <a:spAutoFit/>
           </a:bodyPr>
           <a:lstStyle/>
           <a:p>
-            <a:pPr>
-              <a:defRPr sz="4000" b="1">
+            <a:pPr algn="ctr">
+              <a:defRPr sz="2800" b="1">
                 <a:solidFill>
                   <a:srgbClr val="1976D2"/>
                 </a:solidFill>
               </a:defRPr>
             </a:pPr>
             <a:r>
-              <a:t>static/index.html: ブラウザ UI</a:t>
-            </a:r>
-          </a:p>
-        </p:txBody>
-      </p:sp>
-      <p:sp>
-        <p:nvSpPr>
-          <p:cNvPr id="3" name="TextBox 2"/>
-          <p:cNvSpPr txBox="1"/>
+              <a:t>図解: Pipecat パイプライン詳細</a:t>
+            </a:r>
+          </a:p>
+        </p:txBody>
+      </p:sp>
+      <p:pic>
+        <p:nvPicPr>
+          <p:cNvPr id="3" name="Picture 2" descr="pipeline_jp.png"/>
+          <p:cNvPicPr>
+            <a:picLocks noChangeAspect="1"/>
+          </p:cNvPicPr>
           <p:nvPr/>
-        </p:nvSpPr>
+        </p:nvPicPr>
+        <p:blipFill>
+          <a:blip r:embed="rId2"/>
+          <a:stretch>
+            <a:fillRect/>
+          </a:stretch>
+        </p:blipFill>
         <p:spPr>
           <a:xfrm>
-            <a:off x="640080" y="1280160"/>
-            <a:ext cx="7863840" cy="5029200"/>
+            <a:off x="3170830" y="1051560"/>
+            <a:ext cx="2802340" cy="5486400"/>
           </a:xfrm>
           <a:prstGeom prst="rect">
             <a:avLst/>
           </a:prstGeom>
-          <a:noFill/>
         </p:spPr>
-        <p:txBody>
-          <a:bodyPr wrap="square">
-            <a:spAutoFit/>
-          </a:bodyPr>
-          <a:lstStyle/>
-          <a:p>
-            <a:pPr>
-              <a:spcBef>
-                <a:spcPts val="600"/>
-              </a:spcBef>
-              <a:spcAft>
-                <a:spcPts val="600"/>
-              </a:spcAft>
-              <a:defRPr sz="1800">
-                <a:solidFill>
-                  <a:srgbClr val="323232"/>
-                </a:solidFill>
-              </a:defRPr>
-            </a:pPr>
-            <a:r>
-              <a:t>技術: Vonage OpenTok SDK (バニラ JavaScript)</a:t>
-            </a:r>
-          </a:p>
-          <a:p>
-            <a:pPr>
-              <a:spcBef>
-                <a:spcPts val="600"/>
-              </a:spcBef>
-              <a:spcAft>
-                <a:spcPts val="600"/>
-              </a:spcAft>
-              <a:defRPr sz="1800">
-                <a:solidFill>
-                  <a:srgbClr val="323232"/>
-                </a:solidFill>
-              </a:defRPr>
-            </a:pPr>
-          </a:p>
-          <a:p>
-            <a:pPr>
-              <a:spcBef>
-                <a:spcPts val="600"/>
-              </a:spcBef>
-              <a:spcAft>
-                <a:spcPts val="600"/>
-              </a:spcAft>
-              <a:defRPr sz="1800">
-                <a:solidFill>
-                  <a:srgbClr val="323232"/>
-                </a:solidFill>
-              </a:defRPr>
-            </a:pPr>
-            <a:r>
-              <a:t>機能:</a:t>
-            </a:r>
-          </a:p>
-          <a:p>
-            <a:pPr lvl="1">
-              <a:spcBef>
-                <a:spcPts val="600"/>
-              </a:spcBef>
-              <a:spcAft>
-                <a:spcPts val="600"/>
-              </a:spcAft>
-              <a:defRPr sz="1600">
-                <a:solidFill>
-                  <a:srgbClr val="323232"/>
-                </a:solidFill>
-              </a:defRPr>
-            </a:pPr>
-            <a:r>
-              <a:t>接続ボタン: POST /demo/connect → Vonage セッション作成</a:t>
-            </a:r>
-          </a:p>
-          <a:p>
-            <a:pPr lvl="1">
-              <a:spcBef>
-                <a:spcPts val="600"/>
-              </a:spcBef>
-              <a:spcAft>
-                <a:spcPts val="600"/>
-              </a:spcAft>
-              <a:defRPr sz="1600">
-                <a:solidFill>
-                  <a:srgbClr val="323232"/>
-                </a:solidFill>
-              </a:defRPr>
-            </a:pPr>
-            <a:r>
-              <a:t>ステータス表示: 接続状態をリアルタイム更新</a:t>
-            </a:r>
-          </a:p>
-          <a:p>
-            <a:pPr lvl="1">
-              <a:spcBef>
-                <a:spcPts val="600"/>
-              </a:spcBef>
-              <a:spcAft>
-                <a:spcPts val="600"/>
-              </a:spcAft>
-              <a:defRPr sz="1600">
-                <a:solidFill>
-                  <a:srgbClr val="323232"/>
-                </a:solidFill>
-              </a:defRPr>
-            </a:pPr>
-            <a:r>
-              <a:t>ログパネル: イベント・エラーをタイムスタンプ付きで記録</a:t>
-            </a:r>
-          </a:p>
-          <a:p>
-            <a:pPr lvl="1">
-              <a:spcBef>
-                <a:spcPts val="600"/>
-              </a:spcBef>
-              <a:spcAft>
-                <a:spcPts val="600"/>
-              </a:spcAft>
-              <a:defRPr sz="1600">
-                <a:solidFill>
-                  <a:srgbClr val="323232"/>
-                </a:solidFill>
-              </a:defRPr>
-            </a:pPr>
-            <a:r>
-              <a:t>音声ストリーム: ボットのマイク音声を購読 (audioOnly=true)</a:t>
-            </a:r>
-          </a:p>
-          <a:p>
-            <a:pPr>
-              <a:spcBef>
-                <a:spcPts val="600"/>
-              </a:spcBef>
-              <a:spcAft>
-                <a:spcPts val="600"/>
-              </a:spcAft>
-              <a:defRPr sz="1800">
-                <a:solidFill>
-                  <a:srgbClr val="323232"/>
-                </a:solidFill>
-              </a:defRPr>
-            </a:pPr>
-          </a:p>
-          <a:p>
-            <a:pPr>
-              <a:spcBef>
-                <a:spcPts val="600"/>
-              </a:spcBef>
-              <a:spcAft>
-                <a:spcPts val="600"/>
-              </a:spcAft>
-              <a:defRPr sz="1800">
-                <a:solidFill>
-                  <a:srgbClr val="323232"/>
-                </a:solidFill>
-              </a:defRPr>
-            </a:pPr>
-            <a:r>
-              <a:t>セッション流: OT.initSession() → token で接続 → subscribe()</a:t>
-            </a:r>
-          </a:p>
-        </p:txBody>
-      </p:sp>
+      </p:pic>
     </p:spTree>
   </p:cSld>
   <p:clrMapOvr>
@@ -8065,7 +8293,7 @@
               </a:defRPr>
             </a:pPr>
             <a:r>
-              <a:t>データフロー: ビデオセッション</a:t>
+              <a:t>tts_piper_plus.py: 日本語 TTS</a:t>
             </a:r>
           </a:p>
         </p:txBody>
@@ -8106,115 +8334,145 @@
               </a:defRPr>
             </a:pPr>
             <a:r>
-              <a:t>1. ユーザー: 「接続」ボタンをクリック</a:t>
-            </a:r>
-          </a:p>
-          <a:p>
-            <a:pPr>
-              <a:spcBef>
-                <a:spcPts val="600"/>
-              </a:spcBef>
-              <a:spcAft>
-                <a:spcPts val="600"/>
-              </a:spcAft>
-              <a:defRPr sz="1800">
-                <a:solidFill>
-                  <a:srgbClr val="323232"/>
-                </a:solidFill>
-              </a:defRPr>
-            </a:pPr>
-            <a:r>
-              <a:t>2. ブラウザ: POST /demo/connect を呼び出し</a:t>
-            </a:r>
-          </a:p>
-          <a:p>
-            <a:pPr>
-              <a:spcBef>
-                <a:spcPts val="600"/>
-              </a:spcBef>
-              <a:spcAft>
-                <a:spcPts val="600"/>
-              </a:spcAft>
-              <a:defRPr sz="1800">
-                <a:solidFill>
-                  <a:srgbClr val="323232"/>
-                </a:solidFill>
-              </a:defRPr>
-            </a:pPr>
-            <a:r>
-              <a:t>3. サーバー: Vonage Session 作成 → Audio Connector 起動</a:t>
-            </a:r>
-          </a:p>
-          <a:p>
-            <a:pPr>
-              <a:spcBef>
-                <a:spcPts val="600"/>
-              </a:spcBef>
-              <a:spcAft>
-                <a:spcPts val="600"/>
-              </a:spcAft>
-              <a:defRPr sz="1800">
-                <a:solidFill>
-                  <a:srgbClr val="323232"/>
-                </a:solidFill>
-              </a:defRPr>
-            </a:pPr>
-            <a:r>
-              <a:t>4. ブラウザ: OT.initSession() でセッションに参加</a:t>
-            </a:r>
-          </a:p>
-          <a:p>
-            <a:pPr>
-              <a:spcBef>
-                <a:spcPts val="600"/>
-              </a:spcBef>
-              <a:spcAft>
-                <a:spcPts val="600"/>
-              </a:spcAft>
-              <a:defRPr sz="1800">
-                <a:solidFill>
-                  <a:srgbClr val="323232"/>
-                </a:solidFill>
-              </a:defRPr>
-            </a:pPr>
-            <a:r>
-              <a:t>5. Vonage: Audio Connector が WebSocket に接続</a:t>
-            </a:r>
-          </a:p>
-          <a:p>
-            <a:pPr>
-              <a:spcBef>
-                <a:spcPts val="600"/>
-              </a:spcBef>
-              <a:spcAft>
-                <a:spcPts val="600"/>
-              </a:spcAft>
-              <a:defRPr sz="1800">
-                <a:solidFill>
-                  <a:srgbClr val="323232"/>
-                </a:solidFill>
-              </a:defRPr>
-            </a:pPr>
-            <a:r>
-              <a:t>6. ボット: 初期挨拶を送信 (テキスト → TTS → 音声)</a:t>
-            </a:r>
-          </a:p>
-          <a:p>
-            <a:pPr>
-              <a:spcBef>
-                <a:spcPts val="600"/>
-              </a:spcBef>
-              <a:spcAft>
-                <a:spcPts val="600"/>
-              </a:spcAft>
-              <a:defRPr sz="1800">
-                <a:solidFill>
-                  <a:srgbClr val="323232"/>
-                </a:solidFill>
-              </a:defRPr>
-            </a:pPr>
-            <a:r>
-              <a:t>7. 双方向: ユーザー音声 ↔ Vonage ↔ Pipecat Pipeline ↔ 応答音声</a:t>
+              <a:t>目的: pyopenjtalk（日本語HTS音声合成）を Pipecat インターフェースでラップ</a:t>
+            </a:r>
+          </a:p>
+          <a:p>
+            <a:pPr>
+              <a:spcBef>
+                <a:spcPts val="600"/>
+              </a:spcBef>
+              <a:spcAft>
+                <a:spcPts val="600"/>
+              </a:spcAft>
+              <a:defRPr sz="1800">
+                <a:solidFill>
+                  <a:srgbClr val="323232"/>
+                </a:solidFill>
+              </a:defRPr>
+            </a:pPr>
+          </a:p>
+          <a:p>
+            <a:pPr>
+              <a:spcBef>
+                <a:spcPts val="600"/>
+              </a:spcBef>
+              <a:spcAft>
+                <a:spcPts val="600"/>
+              </a:spcAft>
+              <a:defRPr sz="1800">
+                <a:solidFill>
+                  <a:srgbClr val="323232"/>
+                </a:solidFill>
+              </a:defRPr>
+            </a:pPr>
+            <a:r>
+              <a:t>機能:</a:t>
+            </a:r>
+          </a:p>
+          <a:p>
+            <a:pPr lvl="1">
+              <a:spcBef>
+                <a:spcPts val="600"/>
+              </a:spcBef>
+              <a:spcAft>
+                <a:spcPts val="600"/>
+              </a:spcAft>
+              <a:defRPr sz="1600">
+                <a:solidFill>
+                  <a:srgbClr val="323232"/>
+                </a:solidFill>
+              </a:defRPr>
+            </a:pPr>
+            <a:r>
+              <a:t>非同期実行: スレッドプールで TTS 処理をブロッキング回避</a:t>
+            </a:r>
+          </a:p>
+          <a:p>
+            <a:pPr lvl="1">
+              <a:spcBef>
+                <a:spcPts val="600"/>
+              </a:spcBef>
+              <a:spcAft>
+                <a:spcPts val="600"/>
+              </a:spcAft>
+              <a:defRPr sz="1600">
+                <a:solidFill>
+                  <a:srgbClr val="323232"/>
+                </a:solidFill>
+              </a:defRPr>
+            </a:pPr>
+            <a:r>
+              <a:t>音声正規化: float64 → int16 に変換・クリップ</a:t>
+            </a:r>
+          </a:p>
+          <a:p>
+            <a:pPr lvl="1">
+              <a:spcBef>
+                <a:spcPts val="600"/>
+              </a:spcBef>
+              <a:spcAft>
+                <a:spcPts val="600"/>
+              </a:spcAft>
+              <a:defRPr sz="1600">
+                <a:solidFill>
+                  <a:srgbClr val="323232"/>
+                </a:solidFill>
+              </a:defRPr>
+            </a:pPr>
+            <a:r>
+              <a:t>チャンク化: 4096B 単位で TTSAudioRawFrame を生成</a:t>
+            </a:r>
+          </a:p>
+          <a:p>
+            <a:pPr lvl="1">
+              <a:spcBef>
+                <a:spcPts val="600"/>
+              </a:spcBef>
+              <a:spcAft>
+                <a:spcPts val="600"/>
+              </a:spcAft>
+              <a:defRPr sz="1600">
+                <a:solidFill>
+                  <a:srgbClr val="323232"/>
+                </a:solidFill>
+              </a:defRPr>
+            </a:pPr>
+            <a:r>
+              <a:t>パラメータ: 速度=1.0、ピッチ=0.0（調整可能）</a:t>
+            </a:r>
+          </a:p>
+          <a:p>
+            <a:pPr>
+              <a:spcBef>
+                <a:spcPts val="600"/>
+              </a:spcBef>
+              <a:spcAft>
+                <a:spcPts val="600"/>
+              </a:spcAft>
+              <a:defRPr sz="1800">
+                <a:solidFill>
+                  <a:srgbClr val="323232"/>
+                </a:solidFill>
+              </a:defRPr>
+            </a:pPr>
+          </a:p>
+          <a:p>
+            <a:pPr>
+              <a:spcBef>
+                <a:spcPts val="600"/>
+              </a:spcBef>
+              <a:spcAft>
+                <a:spcPts val="600"/>
+              </a:spcAft>
+              <a:defRPr sz="1800">
+                <a:solidFill>
+                  <a:srgbClr val="323232"/>
+                </a:solidFill>
+              </a:defRPr>
+            </a:pPr>
+            <a:r>
+              <a:t>利点: モデルダウンロード不要、軽量、高速</a:t>
             </a:r>
           </a:p>
         </p:txBody>
